--- a/Модуль 1/Unity Модуль 1 Урок 5. Масиви.pptx
+++ b/Модуль 1/Unity Модуль 1 Урок 5. Масиви.pptx
@@ -129,6 +129,888 @@
 </p:presentation>
 </file>
 
+<file path=ppt/ink/ink1.xml><?xml version="1.0" encoding="utf-8"?>
+<inkml:ink xmlns:inkml="http://www.w3.org/2003/InkML">
+  <inkml:definitions>
+    <inkml:context xml:id="ctx0">
+      <inkml:inkSource xml:id="inkSrc0">
+        <inkml:traceFormat>
+          <inkml:channel name="X" type="integer" min="-2.14748E9" max="2.14748E9" units="cm"/>
+          <inkml:channel name="Y" type="integer" min="-2.14748E9" max="2.14748E9" units="cm"/>
+        </inkml:traceFormat>
+        <inkml:channelProperties>
+          <inkml:channelProperty channel="X" name="resolution" value="1000" units="1/cm"/>
+          <inkml:channelProperty channel="Y" name="resolution" value="1000" units="1/cm"/>
+        </inkml:channelProperties>
+      </inkml:inkSource>
+      <inkml:timestamp xml:id="ts0" timeString="2025-10-29T20:07:21.038"/>
+    </inkml:context>
+    <inkml:brush xml:id="br0">
+      <inkml:brushProperty name="width" value="0.05" units="cm"/>
+      <inkml:brushProperty name="height" value="0.05" units="cm"/>
+      <inkml:brushProperty name="color" value="#0B868D"/>
+      <inkml:brushProperty name="ignorePressure" value="1"/>
+      <inkml:brushProperty name="inkEffects" value="ocean"/>
+      <inkml:brushProperty name="anchorX" value="0"/>
+      <inkml:brushProperty name="anchorY" value="0"/>
+      <inkml:brushProperty name="scaleFactor" value="0.5"/>
+    </inkml:brush>
+  </inkml:definitions>
+  <inkml:trace contextRef="#ctx0" brushRef="#br0">1 1,'0'0</inkml:trace>
+</inkml:ink>
+</file>
+
+<file path=ppt/ink/ink10.xml><?xml version="1.0" encoding="utf-8"?>
+<inkml:ink xmlns:inkml="http://www.w3.org/2003/InkML">
+  <inkml:definitions>
+    <inkml:context xml:id="ctx0">
+      <inkml:inkSource xml:id="inkSrc0">
+        <inkml:traceFormat>
+          <inkml:channel name="X" type="integer" min="-2.14748E9" max="2.14748E9" units="cm"/>
+          <inkml:channel name="Y" type="integer" min="-2.14748E9" max="2.14748E9" units="cm"/>
+        </inkml:traceFormat>
+        <inkml:channelProperties>
+          <inkml:channelProperty channel="X" name="resolution" value="1000" units="1/cm"/>
+          <inkml:channelProperty channel="Y" name="resolution" value="1000" units="1/cm"/>
+        </inkml:channelProperties>
+      </inkml:inkSource>
+      <inkml:timestamp xml:id="ts0" timeString="2025-10-08T19:00:26.344"/>
+    </inkml:context>
+    <inkml:brush xml:id="br0">
+      <inkml:brushProperty name="width" value="0.05" units="cm"/>
+      <inkml:brushProperty name="height" value="0.05" units="cm"/>
+      <inkml:brushProperty name="ignorePressure" value="1"/>
+    </inkml:brush>
+  </inkml:definitions>
+  <inkml:trace contextRef="#ctx0" brushRef="#br0">1 0,'0'0</inkml:trace>
+</inkml:ink>
+</file>
+
+<file path=ppt/ink/ink11.xml><?xml version="1.0" encoding="utf-8"?>
+<inkml:ink xmlns:inkml="http://www.w3.org/2003/InkML">
+  <inkml:definitions>
+    <inkml:context xml:id="ctx0">
+      <inkml:inkSource xml:id="inkSrc0">
+        <inkml:traceFormat>
+          <inkml:channel name="X" type="integer" min="-2.14748E9" max="2.14748E9" units="cm"/>
+          <inkml:channel name="Y" type="integer" min="-2.14748E9" max="2.14748E9" units="cm"/>
+        </inkml:traceFormat>
+        <inkml:channelProperties>
+          <inkml:channelProperty channel="X" name="resolution" value="1000" units="1/cm"/>
+          <inkml:channelProperty channel="Y" name="resolution" value="1000" units="1/cm"/>
+        </inkml:channelProperties>
+      </inkml:inkSource>
+      <inkml:timestamp xml:id="ts0" timeString="2025-10-29T20:19:54.514"/>
+    </inkml:context>
+    <inkml:brush xml:id="br0">
+      <inkml:brushProperty name="width" value="0.05" units="cm"/>
+      <inkml:brushProperty name="height" value="0.05" units="cm"/>
+      <inkml:brushProperty name="color" value="#0B868D"/>
+      <inkml:brushProperty name="ignorePressure" value="1"/>
+      <inkml:brushProperty name="inkEffects" value="ocean"/>
+      <inkml:brushProperty name="anchorX" value="-21124.2207"/>
+      <inkml:brushProperty name="anchorY" value="-35881.80859"/>
+      <inkml:brushProperty name="scaleFactor" value="0.5"/>
+    </inkml:brush>
+  </inkml:definitions>
+  <inkml:trace contextRef="#ctx0" brushRef="#br0">1 255,'0'0,"4"0,8 0,4 0,10 0,3 0,2 0,1 0,4 0,-1 0,-1 5,8 1,5-1,8 5,9-2,11 0,10 2,10-1,-6-1,5-3,2-1,8-2,8-2,8 0,11 11,4 0,2-1,1-1,0-3,-3-2,0-2,-1-1,-7 0,-10-2,-12 1,-15-1,-8 1,-15-6,-3 1,-11-6,-8 1,-8-4,0 2,-3-9,-3 3,9-2,-1 3,-1-1,8 4,-2 4,-3-2,-4-8,2 1,-3 4,-3 3,-7-1,-2 3,4 2,0 3,0 2,1 2,4 1,-5-5,-1 0,-1 0,-1 1,6 1,5-4,1 1,4 0,-2 1,-2 2,-3 2,-8-11,3 1,-2 0,-4 2</inkml:trace>
+</inkml:ink>
+</file>
+
+<file path=ppt/ink/ink12.xml><?xml version="1.0" encoding="utf-8"?>
+<inkml:ink xmlns:inkml="http://www.w3.org/2003/InkML">
+  <inkml:definitions>
+    <inkml:context xml:id="ctx0">
+      <inkml:inkSource xml:id="inkSrc0">
+        <inkml:traceFormat>
+          <inkml:channel name="X" type="integer" min="-2.14748E9" max="2.14748E9" units="cm"/>
+          <inkml:channel name="Y" type="integer" min="-2.14748E9" max="2.14748E9" units="cm"/>
+        </inkml:traceFormat>
+        <inkml:channelProperties>
+          <inkml:channelProperty channel="X" name="resolution" value="1000" units="1/cm"/>
+          <inkml:channelProperty channel="Y" name="resolution" value="1000" units="1/cm"/>
+        </inkml:channelProperties>
+      </inkml:inkSource>
+      <inkml:timestamp xml:id="ts0" timeString="2025-10-29T20:20:05.644"/>
+    </inkml:context>
+    <inkml:brush xml:id="br0">
+      <inkml:brushProperty name="width" value="0.05" units="cm"/>
+      <inkml:brushProperty name="height" value="0.05" units="cm"/>
+      <inkml:brushProperty name="color" value="#0B868D"/>
+      <inkml:brushProperty name="ignorePressure" value="1"/>
+      <inkml:brushProperty name="inkEffects" value="ocean"/>
+      <inkml:brushProperty name="anchorX" value="-39062.28516"/>
+      <inkml:brushProperty name="anchorY" value="-63458"/>
+      <inkml:brushProperty name="scaleFactor" value="0.5"/>
+    </inkml:brush>
+  </inkml:definitions>
+  <inkml:trace contextRef="#ctx0" brushRef="#br0">0 187,'0'0,"5"0,6 0,6-6,3 1,15 0,2 0,1 2,8 1,5 1,2 0,1 1,6 0,5 1,6-1,9-5,3 0,7-1,5 2,-6 1,-2 1,2 1,8 0,-1 1,9 0,2 0,7 1,6-1,-1 0,4 0,-2 0,-9 0,-3 0,-4 0,-1 0,-6 0,-5 0,-10 0,-5 0,-7 0,-1 0,-6-5,3-1,-4 1,3 1,-7 0,2 2,-2 1,-7 1,4 0,-7 0,6 0,-6-10,1-1,-1 0,-4 2,-5 2,-5 3,2 2,-3 1,-1 1,8 0,-2 1,0-1,-4 1,9-6,-3-1,-2 1,7 1,3 1,8 1,2 0,0 2,0 0,3 0,0 0,3 0,-7 1,-1-1,2-5,-1-1,5 1,-2 0,5 2,-7 1,3 1,-2 1,3 0,-1 0,-7 0,3 0,-6 0,3 1,-5-1,-6 0,-5 0,0 0,2 0,-3 0,4 0,2 0,-3 0,3 0,-4 0,-2 0,-5 0,3 0,-2 0,-1 0,-3 0,5 0,-2 0,-1 0,-1 0,4 0,-1 0,-2 0,-1 0,4 0,-1 0,-1 0,-2 0,3 0,0 0,-1 0,-2 10,9 1,-1 0,-1-2,3-3,-3-2,-2-2,-3 5,3-2,-3 1,0-2,-2-1,3-1,0-2,-2 1,10-1,-2 0,-1-1,8 6,-3 0,-3 1,7-2,-3-1,-4-1,-4-1,-9 5,2 0,-2-1,0-1,-1-1,5-1,-5-1</inkml:trace>
+</inkml:ink>
+</file>
+
+<file path=ppt/ink/ink13.xml><?xml version="1.0" encoding="utf-8"?>
+<inkml:ink xmlns:inkml="http://www.w3.org/2003/InkML">
+  <inkml:definitions>
+    <inkml:context xml:id="ctx0">
+      <inkml:inkSource xml:id="inkSrc0">
+        <inkml:traceFormat>
+          <inkml:channel name="X" type="integer" min="-2.14748E9" max="2.14748E9" units="cm"/>
+          <inkml:channel name="Y" type="integer" min="-2.14748E9" max="2.14748E9" units="cm"/>
+        </inkml:traceFormat>
+        <inkml:channelProperties>
+          <inkml:channelProperty channel="X" name="resolution" value="1000" units="1/cm"/>
+          <inkml:channelProperty channel="Y" name="resolution" value="1000" units="1/cm"/>
+        </inkml:channelProperties>
+      </inkml:inkSource>
+      <inkml:timestamp xml:id="ts0" timeString="2025-10-29T20:20:12.562"/>
+    </inkml:context>
+    <inkml:brush xml:id="br0">
+      <inkml:brushProperty name="width" value="0.05" units="cm"/>
+      <inkml:brushProperty name="height" value="0.05" units="cm"/>
+      <inkml:brushProperty name="color" value="#0B868D"/>
+      <inkml:brushProperty name="ignorePressure" value="1"/>
+      <inkml:brushProperty name="inkEffects" value="ocean"/>
+      <inkml:brushProperty name="anchorX" value="-48261.80859"/>
+      <inkml:brushProperty name="anchorY" value="-64422.17578"/>
+      <inkml:brushProperty name="scaleFactor" value="0.5"/>
+    </inkml:brush>
+  </inkml:definitions>
+  <inkml:trace contextRef="#ctx0" brushRef="#br0">0 1,'0'0,"18"0,22 0,14 0,23 0,19 0,26 0,23 0,23 0,19 0,23 0,20 0,26 0,23 0,22 0,18 0,24 0,19 0,27 0,16 0,18 0,17 0,10 0,10 0,2 0,5 0,-2 0,-3 0,-8 0,-15 0,-13 0,-17 0,-20 0,-16 0,-24 0,-78 0</inkml:trace>
+</inkml:ink>
+</file>
+
+<file path=ppt/ink/ink14.xml><?xml version="1.0" encoding="utf-8"?>
+<inkml:ink xmlns:inkml="http://www.w3.org/2003/InkML">
+  <inkml:definitions>
+    <inkml:context xml:id="ctx0">
+      <inkml:inkSource xml:id="inkSrc0">
+        <inkml:traceFormat>
+          <inkml:channel name="X" type="integer" min="-2.14748E9" max="2.14748E9" units="cm"/>
+          <inkml:channel name="Y" type="integer" min="-2.14748E9" max="2.14748E9" units="cm"/>
+        </inkml:traceFormat>
+        <inkml:channelProperties>
+          <inkml:channelProperty channel="X" name="resolution" value="1000" units="1/cm"/>
+          <inkml:channelProperty channel="Y" name="resolution" value="1000" units="1/cm"/>
+        </inkml:channelProperties>
+      </inkml:inkSource>
+      <inkml:timestamp xml:id="ts0" timeString="2025-10-29T20:20:14.307"/>
+    </inkml:context>
+    <inkml:brush xml:id="br0">
+      <inkml:brushProperty name="width" value="0.05" units="cm"/>
+      <inkml:brushProperty name="height" value="0.05" units="cm"/>
+      <inkml:brushProperty name="color" value="#0B868D"/>
+      <inkml:brushProperty name="ignorePressure" value="1"/>
+      <inkml:brushProperty name="inkEffects" value="ocean"/>
+      <inkml:brushProperty name="anchorX" value="-60017.75781"/>
+      <inkml:brushProperty name="anchorY" value="-65438.17578"/>
+      <inkml:brushProperty name="scaleFactor" value="0.5"/>
+    </inkml:brush>
+  </inkml:definitions>
+  <inkml:trace contextRef="#ctx0" brushRef="#br0">1 215,'0'0,"8"-4,20-2,10 0,19-9,22-4,24 0,32-2,37-1,39 4,42 4,36-6,37 4,45 2,33 5,30 3,17 2,19 3,18 1,11 0,12 1,3 0,-10-1,-3 1,-1 4,-12 1,-16-1,-11 0,-17-2,-27-1,-18-1,-15-1,-21 0,-16 0,-18 0,-16 0,-15 0,-20-1,-25 1,-59 0</inkml:trace>
+</inkml:ink>
+</file>
+
+<file path=ppt/ink/ink15.xml><?xml version="1.0" encoding="utf-8"?>
+<inkml:ink xmlns:inkml="http://www.w3.org/2003/InkML">
+  <inkml:definitions>
+    <inkml:context xml:id="ctx0">
+      <inkml:inkSource xml:id="inkSrc0">
+        <inkml:traceFormat>
+          <inkml:channel name="X" type="integer" min="-2.14748E9" max="2.14748E9" units="cm"/>
+          <inkml:channel name="Y" type="integer" min="-2.14748E9" max="2.14748E9" units="cm"/>
+        </inkml:traceFormat>
+        <inkml:channelProperties>
+          <inkml:channelProperty channel="X" name="resolution" value="1000" units="1/cm"/>
+          <inkml:channelProperty channel="Y" name="resolution" value="1000" units="1/cm"/>
+        </inkml:channelProperties>
+      </inkml:inkSource>
+      <inkml:timestamp xml:id="ts0" timeString="2025-10-29T20:20:15.154"/>
+    </inkml:context>
+    <inkml:brush xml:id="br0">
+      <inkml:brushProperty name="width" value="0.05" units="cm"/>
+      <inkml:brushProperty name="height" value="0.05" units="cm"/>
+      <inkml:brushProperty name="color" value="#0B868D"/>
+      <inkml:brushProperty name="ignorePressure" value="1"/>
+      <inkml:brushProperty name="inkEffects" value="ocean"/>
+      <inkml:brushProperty name="anchorX" value="-73820.10938"/>
+      <inkml:brushProperty name="anchorY" value="-66269.14844"/>
+      <inkml:brushProperty name="scaleFactor" value="0.5"/>
+    </inkml:brush>
+  </inkml:definitions>
+  <inkml:trace contextRef="#ctx0" brushRef="#br0">0 825,'0'0,"9"0,25-5,19 0,10-1,10 2,5-4,13-5,13-10,21-3,14-4,11 0,18-5,15 0,17 1,14 2,18-3,12 0,10 2,13 2,19-4,8 2,5 0,1 2,4-4,-1 1,3 2,2 1,-1 7,-4-4,-3 0,2 6,-8 5,-2 6,-7 4,-12 4,-16 2,-15 2,-18 0,-15 0,-17 0,-18 0,-21-1,-28 0,-35 1</inkml:trace>
+</inkml:ink>
+</file>
+
+<file path=ppt/ink/ink16.xml><?xml version="1.0" encoding="utf-8"?>
+<inkml:ink xmlns:inkml="http://www.w3.org/2003/InkML">
+  <inkml:definitions>
+    <inkml:context xml:id="ctx0">
+      <inkml:inkSource xml:id="inkSrc0">
+        <inkml:traceFormat>
+          <inkml:channel name="X" type="integer" min="-2.14748E9" max="2.14748E9" units="cm"/>
+          <inkml:channel name="Y" type="integer" min="-2.14748E9" max="2.14748E9" units="cm"/>
+        </inkml:traceFormat>
+        <inkml:channelProperties>
+          <inkml:channelProperty channel="X" name="resolution" value="1000" units="1/cm"/>
+          <inkml:channelProperty channel="Y" name="resolution" value="1000" units="1/cm"/>
+        </inkml:channelProperties>
+      </inkml:inkSource>
+      <inkml:timestamp xml:id="ts0" timeString="2025-10-08T19:01:32.508"/>
+    </inkml:context>
+    <inkml:brush xml:id="br0">
+      <inkml:brushProperty name="width" value="0.05" units="cm"/>
+      <inkml:brushProperty name="height" value="0.05" units="cm"/>
+      <inkml:brushProperty name="ignorePressure" value="1"/>
+    </inkml:brush>
+  </inkml:definitions>
+  <inkml:trace contextRef="#ctx0" brushRef="#br0">1 1,'0'0</inkml:trace>
+</inkml:ink>
+</file>
+
+<file path=ppt/ink/ink17.xml><?xml version="1.0" encoding="utf-8"?>
+<inkml:ink xmlns:inkml="http://www.w3.org/2003/InkML">
+  <inkml:definitions>
+    <inkml:context xml:id="ctx0">
+      <inkml:inkSource xml:id="inkSrc0">
+        <inkml:traceFormat>
+          <inkml:channel name="X" type="integer" min="-2.14748E9" max="2.14748E9" units="cm"/>
+          <inkml:channel name="Y" type="integer" min="-2.14748E9" max="2.14748E9" units="cm"/>
+        </inkml:traceFormat>
+        <inkml:channelProperties>
+          <inkml:channelProperty channel="X" name="resolution" value="1000" units="1/cm"/>
+          <inkml:channelProperty channel="Y" name="resolution" value="1000" units="1/cm"/>
+        </inkml:channelProperties>
+      </inkml:inkSource>
+      <inkml:timestamp xml:id="ts0" timeString="2025-10-29T20:20:35.122"/>
+    </inkml:context>
+    <inkml:brush xml:id="br0">
+      <inkml:brushProperty name="width" value="0.05" units="cm"/>
+      <inkml:brushProperty name="height" value="0.05" units="cm"/>
+      <inkml:brushProperty name="color" value="#0B868D"/>
+      <inkml:brushProperty name="ignorePressure" value="1"/>
+      <inkml:brushProperty name="inkEffects" value="ocean"/>
+      <inkml:brushProperty name="anchorX" value="-26500.52148"/>
+      <inkml:brushProperty name="anchorY" value="-36643.76172"/>
+      <inkml:brushProperty name="scaleFactor" value="0.5"/>
+    </inkml:brush>
+  </inkml:definitions>
+  <inkml:trace contextRef="#ctx0" brushRef="#br0">1 0,'0'0,"4"0,13 0,5 0,4 0,2 0,6 0,1 0,-1 0,-1 0,3 0,-2 0,-1 0,-1 0,3 0,-2 0,0 0,-7 0</inkml:trace>
+</inkml:ink>
+</file>
+
+<file path=ppt/ink/ink18.xml><?xml version="1.0" encoding="utf-8"?>
+<inkml:ink xmlns:inkml="http://www.w3.org/2003/InkML">
+  <inkml:definitions>
+    <inkml:context xml:id="ctx0">
+      <inkml:inkSource xml:id="inkSrc0">
+        <inkml:traceFormat>
+          <inkml:channel name="X" type="integer" min="-2.14748E9" max="2.14748E9" units="cm"/>
+          <inkml:channel name="Y" type="integer" min="-2.14748E9" max="2.14748E9" units="cm"/>
+        </inkml:traceFormat>
+        <inkml:channelProperties>
+          <inkml:channelProperty channel="X" name="resolution" value="1000" units="1/cm"/>
+          <inkml:channelProperty channel="Y" name="resolution" value="1000" units="1/cm"/>
+        </inkml:channelProperties>
+      </inkml:inkSource>
+      <inkml:timestamp xml:id="ts0" timeString="2025-10-29T20:22:21.901"/>
+    </inkml:context>
+    <inkml:brush xml:id="br0">
+      <inkml:brushProperty name="width" value="0.05" units="cm"/>
+      <inkml:brushProperty name="height" value="0.05" units="cm"/>
+      <inkml:brushProperty name="color" value="#0B868D"/>
+      <inkml:brushProperty name="ignorePressure" value="1"/>
+      <inkml:brushProperty name="inkEffects" value="ocean"/>
+      <inkml:brushProperty name="anchorX" value="-28011.98242"/>
+      <inkml:brushProperty name="anchorY" value="-37659.76172"/>
+      <inkml:brushProperty name="scaleFactor" value="0.5"/>
+    </inkml:brush>
+  </inkml:definitions>
+  <inkml:trace contextRef="#ctx0" brushRef="#br0">2120 400,'0'0,"0"9,0 8,0 10,0 14,0 8,0 10,0 14,0 0,0 4,-5 2,-1 1,0-5,2 4,-5 1,1-4,2-1,1-5,2 1,1-5,1 2,1-4,0 3,0-8,1-2,10-4,0-1,5-5,-1-1,2-5,-3-5,2-3,7 8,3-3,3 0,0 2,5-3,-5-1,-2-9,0-3,-1 5,4-6,-4 0,0-5,-1-5,0-5,5-4,1 3,0-1,0-1,9 4,-1-2,-1 10,4-1,2 4,-3-4,8-3,-3 1,7-3,-4 2,1-2,0 8,1-2,-5 2,6-3,-5-3,6 1,2-4,5 4,1-4,10-1,-1 7,8 4,8-2,-4-3,1-4,3-5,0 3,4-2,10-1,10 3,2-1,7 10,0-2,3-2,3 2,-8-4,2-2,2 2,2-3,-3-2,4-2,-4-2,-4-1,-8-2,-3 0,-3 0,0-1,-5 1,1-1,1 1,1 0,-3 0,-4 0,1 0,-4 0,-3 0,3 0,-2 0,-1 0,2 0,-7 0,-1 0,-2 0,-6 0,-6 0,6 0,-5-10,8-1,3-5,1 2,1-3,5 3,-5-3,0 4,-7 3,4-7,6-3,1-4,6-1,4 4,4-7,-2 1,-3-2,-9 6,-5 1,-13-6,-1 5,-11-1,-4 6,-1-1,-6 5,-6-1,7 3,-4-8,-2-2,7 2,-3-1,3-1,1-6,-3-2,-4-1,-4 1,1-5,-8 1,-1 1,-8 1,-6-3,-1 6,-3 2,-3 1,-3 1,-2-5,-1-1,4 0,0 1,0-5,-1 1,-2 1,0 2,-1-4,-1 1,1 1,-2 2,1-4,-5 2,-1-5,1-4,-10 1,-5-2,2-8,-3 3,4 3,4-5,-1 4,4 3,-8 1,2 3,2 3,-1 4,2-3,-1 2,2 1,-2 1,-8-8,2 0,-3 1,0-3,-2 3,-5 2,3 3,1-2,6 1,0 7,5 1,-1 8,4 0,-7 5,2-7,-3-2,-1 2,4 0,-2 3,-6 0,-3 3,0-6,-12 2,0-2,-15-1,-3 3,-13 0,-1-8,-8 5,-8-3,-6 1,4 3,-2 6,-3-1,8 4,-3-7,8 2,-3-3,-3 4,5 3,-4-2,2 4,1 1,-5 4,-3 2,-5 1,2 2,2 0,10 1,-3-1,-7 1,-10-1,-16 0,-7 0,-17 0,-9 0,-6 0,-3 0,-7 0,0 0,0 0,3 0,-4 0,2 0,1 0,3 0,-10 0,-3 0,-10 0,-14 0,-7 0,-6 0,4 0,-1 0,5 0,1 0,4 0,-1 0,9 0,9 0,3 0,6 0,6 0,4 0,-3 0,3 0,0 0,1 0,8 0,6 0,11 0,10 0,10 0,16 0,21 0,14 0,15 0,11 0,8 0,0 0,8 11,1 0,7 5,-1-1,6 2,2 2,-1-2,3 6,-9 2,1 2,2 1,4 5,3 1,3-1,2 9,7-1,6 3,16 4,5 1,9-3,5 1,4 1,8-5,1 2,6-4,-1-4,4-4,-2 3,2-3,-2 0,2-3,3 4,2-6,-3-1,2-1,-4-7,-4-4,-3-1,7-3,-8 6,4-1,-2-3,3 2,-3-3,-6-3,3-3,-3 3,0-1,-6-2,-7-2,-5-1,0-1,-4-2,-2 0,-7 0</inkml:trace>
+</inkml:ink>
+</file>
+
+<file path=ppt/ink/ink19.xml><?xml version="1.0" encoding="utf-8"?>
+<inkml:ink xmlns:inkml="http://www.w3.org/2003/InkML">
+  <inkml:definitions>
+    <inkml:context xml:id="ctx0">
+      <inkml:inkSource xml:id="inkSrc0">
+        <inkml:traceFormat>
+          <inkml:channel name="X" type="integer" min="-2.14748E9" max="2.14748E9" units="cm"/>
+          <inkml:channel name="Y" type="integer" min="-2.14748E9" max="2.14748E9" units="cm"/>
+        </inkml:traceFormat>
+        <inkml:channelProperties>
+          <inkml:channelProperty channel="X" name="resolution" value="1000" units="1/cm"/>
+          <inkml:channelProperty channel="Y" name="resolution" value="1000" units="1/cm"/>
+        </inkml:channelProperties>
+      </inkml:inkSource>
+      <inkml:timestamp xml:id="ts0" timeString="2025-10-29T20:22:24.578"/>
+    </inkml:context>
+    <inkml:brush xml:id="br0">
+      <inkml:brushProperty name="width" value="0.05" units="cm"/>
+      <inkml:brushProperty name="height" value="0.05" units="cm"/>
+      <inkml:brushProperty name="color" value="#0B868D"/>
+      <inkml:brushProperty name="ignorePressure" value="1"/>
+      <inkml:brushProperty name="inkEffects" value="ocean"/>
+      <inkml:brushProperty name="anchorX" value="-29049.36328"/>
+      <inkml:brushProperty name="anchorY" value="-39577.03125"/>
+      <inkml:brushProperty name="scaleFactor" value="0.5"/>
+    </inkml:brush>
+  </inkml:definitions>
+  <inkml:trace contextRef="#ctx0" brushRef="#br0">955 29,'0'0,"-5"0,-6 0,-5 0,-10 11,-4 0,-1 5,0-2,-5 4,1-4,1 2,2-4,-4 9,2-4,6 3,2-3,2 0,-4-3,4 2,-1 7,1-3,4 2,1-4,-6 1,-2 1,-1 6,-1 3,5 1,-3-6,-1 0,5 5,6 0,0 6,0 5,2-1,4 4,-6 3,1-3,4 2,2 2,-1 1,2-3,2 6,2-4,2 6,2-3,0 0,1 5,1-4,-1 5,1 0,-1 6,0 0,5 4,1-2,5 4,4-3,4 3,9-3,8 3,1-3,10 8,4 8,14-2,7 6,0-11,3 0,1-6,7 0,11 2,12 2,10 7,9-2,9 1,15-5,7-1,9-4,9 1,5-3,-2 1,9-8,0-3,13-2,5-8,5-5,14-6,12 1,11-2,19-2,12-2,15 4,15-1,3-6,16-7,3-7,11-5,9-5,-2-2,1-2,3 0,-5-6,-1-5,-7-5,-11-4,-1-9,-14-1,-8-2,-12-9,-15 0,-14-3,-16-3,-13-2,-16 4,-13-6,-14 4,-13-6,-14 4,-13 5,-8-4,-13 3,-8 5,-13-6,-5 3,-9 3,-11-6,-5 3,-8 4,-2-8,-5 5,2 2,-2-7,-9 4,3-2,-2-7,5 4,-7-7,5-1,-1-4,5-1,-7-4,-1 1,4-3,-2-2,1-4,-7 3,-7-1,-5-7,-1 9,-8-6,-3 9,-8 5,-6-1,-5 3,-4 1,-3 8,-6 7,-2-4,-5 4,-4 5,-5 3,3-1,-7 2,-1 2,-2 2,-1 8,-5-5,1 7,0-1,-9 0,-4 4,-10 0,-2 4,-12-7,0-2,-9-2,-7 3,-8 0,0-5,-3 4,-4-1,10 5,-3 1,5 3,3 0,3 2,6-6,-3 2,1-3,-1 4,5 4,6-1,0 3,4-3,-7 2,3 3,-2 2,2-8,-6 1,-2 1,3-2,-1 2,5 3,-1 3,10 2,3-3,5 1,0 1,7 1,-4-4,3 1,-5-10,-1 1,-7 2,-1-2,-4 3,1-2,-4 3,-3 3,-3-2,3-9,-6 2,-8 2,-6-1,-1 3,-4-1,-3 3,-3 2,3-1,5 2,9 2,0 2,-3 2,-4 1,1 2,-4 0,2 0,3 1,-2-1,3 0,1 0,4 1,-4-1,7 0,-5 0,8 0,-5 0,-4 0,-6 0,0 0,-3 0,-3 0,-2 0,3 0,-2 0,-5 0,-3 0,0 0,5 0,-5 0,0 0,0 0,0 0,6 0,0 0,1 0,0 5,-7 0,4 1,-1 9,1-1,-6-1,0 2,5-2,0-3,7-4,11-2,5 3,9-1,2-1,10-1,5-1,-1-2,6 0,-5 5,1-1,-10 0,-1-1,-5-1,-8-1,3-1,-2-1,0 0,0 0,-6 0,10 0,-5 0,5-1,1 12,9 0,10-1,10-1,2-2,6-3,3-2,4-1,-4-1,1 0,0-1,2 1,-4-1,0 1,2 0,-10 0,2 0,-5 0,-2 0,-7 0,-8 0,-1 0,-5 0,1 0,3 0,3 5,8 1,3 0,6-2,1 0,-1-2,4 4,3 0,3 0,-7-2,1-1,-8-1,-4-2,4 1,-7-1,0 0,-6-1,-1 1,-3 0,0 5,-2 0,1 1,-2-2,3-1,-8-1,-3-1,3 0,9-1,-1 0,10 0,8-1,-3 1,6 0,4 0,-1 0,-2 0,3 0,-2 0,3 0,-3 0,-2 0,2 0,-1 0,-2 0,2 0,4 0,4 0,-2 0,2 0,3 0,1 0,-4 0,7 0</inkml:trace>
+</inkml:ink>
+</file>
+
+<file path=ppt/ink/ink2.xml><?xml version="1.0" encoding="utf-8"?>
+<inkml:ink xmlns:inkml="http://www.w3.org/2003/InkML">
+  <inkml:definitions>
+    <inkml:context xml:id="ctx0">
+      <inkml:inkSource xml:id="inkSrc0">
+        <inkml:traceFormat>
+          <inkml:channel name="X" type="integer" min="-2.14748E9" max="2.14748E9" units="cm"/>
+          <inkml:channel name="Y" type="integer" min="-2.14748E9" max="2.14748E9" units="cm"/>
+        </inkml:traceFormat>
+        <inkml:channelProperties>
+          <inkml:channelProperty channel="X" name="resolution" value="1000" units="1/cm"/>
+          <inkml:channelProperty channel="Y" name="resolution" value="1000" units="1/cm"/>
+        </inkml:channelProperties>
+      </inkml:inkSource>
+      <inkml:timestamp xml:id="ts0" timeString="2025-10-29T20:17:48.040"/>
+    </inkml:context>
+    <inkml:brush xml:id="br0">
+      <inkml:brushProperty name="width" value="0.05" units="cm"/>
+      <inkml:brushProperty name="height" value="0.05" units="cm"/>
+      <inkml:brushProperty name="color" value="#0B868D"/>
+      <inkml:brushProperty name="ignorePressure" value="1"/>
+      <inkml:brushProperty name="inkEffects" value="ocean"/>
+      <inkml:brushProperty name="anchorX" value="-22758.91211"/>
+      <inkml:brushProperty name="anchorY" value="-29294.3125"/>
+      <inkml:brushProperty name="scaleFactor" value="0.5"/>
+    </inkml:brush>
+  </inkml:definitions>
+  <inkml:trace contextRef="#ctx0" brushRef="#br0">0 353,'0'0,"0"-5,5-1,11 1,6 0,4 2,2 1,12 1,0 1,0 0,2 0,2 0,-2 0,8 0,1 1,2-1,-4 0,0 0,0 0,1 0,-5-6,1 1,-5 0,-3 0,-5 2,3-9,-3 0,-1 0,-1-2,3 3,-1-4,5 3,3-3,5 3,-2-8,1-3,2 3,-3-1,1 4,-4-1,-4 4,-3 4,2-7,-3 2,-5 2</inkml:trace>
+</inkml:ink>
+</file>
+
+<file path=ppt/ink/ink20.xml><?xml version="1.0" encoding="utf-8"?>
+<inkml:ink xmlns:inkml="http://www.w3.org/2003/InkML">
+  <inkml:definitions>
+    <inkml:context xml:id="ctx0">
+      <inkml:inkSource xml:id="inkSrc0">
+        <inkml:traceFormat>
+          <inkml:channel name="X" type="integer" min="-2.14748E9" max="2.14748E9" units="cm"/>
+          <inkml:channel name="Y" type="integer" min="-2.14748E9" max="2.14748E9" units="cm"/>
+        </inkml:traceFormat>
+        <inkml:channelProperties>
+          <inkml:channelProperty channel="X" name="resolution" value="1000" units="1/cm"/>
+          <inkml:channelProperty channel="Y" name="resolution" value="1000" units="1/cm"/>
+        </inkml:channelProperties>
+      </inkml:inkSource>
+      <inkml:timestamp xml:id="ts0" timeString="2025-10-29T20:22:35.428"/>
+    </inkml:context>
+    <inkml:brush xml:id="br0">
+      <inkml:brushProperty name="width" value="0.05" units="cm"/>
+      <inkml:brushProperty name="height" value="0.05" units="cm"/>
+      <inkml:brushProperty name="color" value="#0B868D"/>
+      <inkml:brushProperty name="ignorePressure" value="1"/>
+      <inkml:brushProperty name="inkEffects" value="ocean"/>
+      <inkml:brushProperty name="anchorX" value="-93532.64844"/>
+      <inkml:brushProperty name="anchorY" value="-72328.78125"/>
+      <inkml:brushProperty name="scaleFactor" value="0.5"/>
+    </inkml:brush>
+  </inkml:definitions>
+  <inkml:trace contextRef="#ctx0" brushRef="#br0">1 3443,'0'0,"4"0,7 0,11 6,4 4,3 6,12 15,1 4,3 12,9 5,2 9,12 1,5 6,5 3,8 4,6-4,6 2,-1-4,2 7,2 1,-9-9,1-9,1-1,8-2,8 3,9 0,5 5,10-2,9-6,11 3,6-7,9-7,11 5,5-5,9-5,1 2,10-5,4-2,-1-3,5 3,7-2,-5-6,-1-2,-6-6,4-6,-6 0,1-4,-5-2,-5 8,-4-2,-9-2,3-2,-7 3,-5-3,-1-2,-8-2,-10-2,-8-2,-18 0,-10-1,-9-1,-5 1,-12 0,-3-1,-9 1,1 0,-2 0,-5 0,4 0,6 0,0 0,5 0,5 0,8 0,10 0,6 0,7 0,3 0,8 0,7 0,0 0,9 0,3 0,3 0,1-5,6-1,-1-4,0-5,-7-5,-7-8,-8-2,-4 3,-5 1,-7 1,-8-5,-10-1,-5 1,-9-1,-5-3,-6 0,-9 1,-1 2,-7-4,-6 1,-3 1,-8 2,2-4,0 1,0 2,-6 1,1-4,0 1,-4 2,-5 1,-5-4,-8 1,3 6,-8 3,1 6,-6 1,-4-6,-5-2,-3-1,-2-1,3-6,0 1,-1 0,0-9,-2 1,5 1,-1-7,11 3,-2-3,4-6,-2-2,1-7,-4 0,2 1,-3 1,-4 8,8-4,3 7,-2-5,-3 5,1 5,-3-5,1 4,-3 4,-2 5,-3-7,8 2,-1 3,-2-3,3-2,-3 2,-2-2,-3 3,-2 3,3 4,0-3,-2 2,-1-4,4-3,-1 1,0 2,-3 3,-1-2,-1 2,-1 2,-1 2,10-3,1 0,0 2,-3 1,-2-4,-2-4,-7 1,-1-3,-7 1,-4 3,-10-7,1 2,-1 2,-1 4,0-2,-5 2,-1 3,0 1,1-2,-4 0,1 7,1 2,1 1,-3-5,2 5,0 0,-9-1,2 1,1 4,2-5,-6 4,1 0,-7-2,2 6,-2-2,-11-6,-7-2,-6-2,-10 0,-7-4,-7-1,5 6,4 2,3 6,-3 1,-3-5,6 4,2-2,7 5,2-2,6 5,5 4,4-2,8 2,3 3,6-8,-1 2,0 0,3 4,2-2,5 2,-3 1,-4 4,2-5,-3 2,2 1,-3 2,-2-4,2 0,4 2,3 1,-2 2,2 1,2 1,2-9,-3-1,1 1,0-4,2 2,-3 3,0 3,1-4,2 3,-3 1,0 1,-4-3,-4 1,2 1,-4 2,-1-10,-3 1,-8 1,4-2,5 2,-5 3,5 2,5-2,4 2,0 1,2 2,3 1,3-4,-4 1,1 1,0 0,3 3,-5 0,2-10,-5 1,-4 0,-3 2,-10-2,-1 1,-8 3,1-4,-10 3,2-5,-8 3,-7-9,3 2,0 2,7 4,2 4,5-3,-6 3,-6-4,3 1,-1-3,-5 1,4-7,2 1,10 4,6-3,1 5,7 2,-3 4,2-3,5 1,1 2,0 2,5-4,0 1,3 1,-1 2,-7 1,-2-9,-9 0,0 1,-11-3,-5 2,2 3,-1-2,4 1,-6 3,4-4,-1 2,5 2,-2 2,4-9,-1 2,3 0,-2 3,3 3,-3 2,7 3,-1 0,1 1,-3 0,7 1,1 0,-3-1,1 0,0 0,1 0,-5 0,7 0,5 0,-3 0,6 0,-1 0,-1 0,5 0,3 0,5 0,-7 0,3 0,1 0,-8 0,3 0,3 0,-8 0,4 0,-8 0,4 0,-1 6,-1-1,-1 0,5 0,-6-2,5-1,4 4,-6 0,5 0,3-2,-6-1,3 4,-7 0,3-1,4-2,-5 0,4-3,3 0,-6 10,-1 0,3-1,-1-1,-2-3,5-2,-1 3,5 0,-3-2,-1-1,3-1,3 4,3-1,-1-1,1 0,3-2,1 4,-4-1,2 10,1 0,1-2,-4 2,1-3,7 2,1-3,2 2,-5-2,0 8,-1 2,0 4,-4 1,0 6,7 0,1-5,7-2,0-6,5-1,-6-5,3 6,-2-3,4 2,-2 2,4 1,3 8,-2-5,2 1,3 0,-9-6,2 0,2 6,3 1,-3-4,3 0,2 0,-3-4,1 5,2 1,2 2,-3-5,1 0,1 5,1 1,2 2,2-1,0 5,-10-1,0 0,1-1,-4 3,2-1,2-1,-1-2,1 9,-3 5,3 4,1-3,3-3,2-5,-8 1,0-4,1-1,2-3,3 3,2 4,-3-5,1 8,1-2,1-1,1-3,2 2,0-2,-5-1,1-3,0 4,1-2,-4 0,0 8,2-1,1-1,-9-3,2 8,0-3,3 9,3-3,-4-3,3 5,-5-3,2-4,2-5,2 2,2-4,-3 3,1 4,0-2,2-3,1-2,1 2,-9-2,0-2,1-3,1 5,3 4,2-1,2 3,-4-1,1-3,-1-4,3 3,-6-7,2-1,0-3,3 0,0 5,-3 0,1 6,-10 5,0-1,3-1,2-4,4 2,3-1,2-3,-4-2,0 4,2-2,0 0,1-2,2 3,0 0,-5-7,1-1,0-2,1 5,1 1,-5 0,2-1,-1 6,3-2,1 0,1-2,1-6</inkml:trace>
+</inkml:ink>
+</file>
+
+<file path=ppt/ink/ink21.xml><?xml version="1.0" encoding="utf-8"?>
+<inkml:ink xmlns:inkml="http://www.w3.org/2003/InkML">
+  <inkml:definitions>
+    <inkml:context xml:id="ctx0">
+      <inkml:inkSource xml:id="inkSrc0">
+        <inkml:traceFormat>
+          <inkml:channel name="X" type="integer" min="-2.14748E9" max="2.14748E9" units="cm"/>
+          <inkml:channel name="Y" type="integer" min="-2.14748E9" max="2.14748E9" units="cm"/>
+        </inkml:traceFormat>
+        <inkml:channelProperties>
+          <inkml:channelProperty channel="X" name="resolution" value="1000" units="1/cm"/>
+          <inkml:channelProperty channel="Y" name="resolution" value="1000" units="1/cm"/>
+        </inkml:channelProperties>
+      </inkml:inkSource>
+      <inkml:timestamp xml:id="ts0" timeString="2025-10-29T20:22:43.002"/>
+    </inkml:context>
+    <inkml:brush xml:id="br0">
+      <inkml:brushProperty name="width" value="0.05" units="cm"/>
+      <inkml:brushProperty name="height" value="0.05" units="cm"/>
+      <inkml:brushProperty name="color" value="#0B868D"/>
+      <inkml:brushProperty name="ignorePressure" value="1"/>
+      <inkml:brushProperty name="inkEffects" value="ocean"/>
+      <inkml:brushProperty name="anchorX" value="-96028.89844"/>
+      <inkml:brushProperty name="anchorY" value="-74582.50781"/>
+      <inkml:brushProperty name="scaleFactor" value="0.5"/>
+    </inkml:brush>
+  </inkml:definitions>
+  <inkml:trace contextRef="#ctx0" brushRef="#br0">0 4549,'0'0,"0"5,0 6,0 5,0 5,0 8,10 2,1 7,5 5,4-2,2-1,13 6,8 3,10-3,15 7,8-4,11 5,2-9,0-5,9-6,9-4,19 8,13-1,16-1,18 8,19-1,12-2,13 1,10-3,12-8,14-9,13-8,17-6,13-5,15-3,7-6,10-7,2-5,4-4,-2-8,3-2,-8-6,-10-10,-13-4,-14-4,-10 0,-14 5,-21-5,-14 1,-16 0,-12 0,-20 6,-18-5,-13 6,-11 4,-17-4,-9-2,-7-1,1 4,4-1,0 0,5 4,-7-1,-1-1,-3 4,4-2,-1-2,-5 4,-1-2,-1-1,0-3,-5 4,1-7,-5 4,-4-7,1 5,-2-1,-8 0,-2-1,-13 5,-6-5,-5 4,-3-7,-7 5,0 5,-4-6,-5 5,-4 3,3-5,-2 3,-1 4,-2 3,4-1,-6-3,-1 3,-1-4,-1 3,5-3,-4-2,-1 3,-5 2,-1 4,-4-2,-5 3,-3-5,-4-2,-1 1,-2-3,-1-2,1-3,-1 3,0-6,1 4,-1-7,-9-1,-2-6,-4 0,-4-5,-2 2,-8-4,-2-2,5-4,1-7,1-3,6 0,-6-6,0 2,4-5,-1 2,5 2,0 3,4 8,3-4,4 2,-8 5,2 0,1 5,2 11,3-1,-2 8,1-3,1 6,2 0,-5 1,2 9</inkml:trace>
+</inkml:ink>
+</file>
+
+<file path=ppt/ink/ink22.xml><?xml version="1.0" encoding="utf-8"?>
+<inkml:ink xmlns:inkml="http://www.w3.org/2003/InkML">
+  <inkml:definitions>
+    <inkml:context xml:id="ctx0">
+      <inkml:inkSource xml:id="inkSrc0">
+        <inkml:traceFormat>
+          <inkml:channel name="X" type="integer" min="-2.14748E9" max="2.14748E9" units="cm"/>
+          <inkml:channel name="Y" type="integer" min="-2.14748E9" max="2.14748E9" units="cm"/>
+        </inkml:traceFormat>
+        <inkml:channelProperties>
+          <inkml:channelProperty channel="X" name="resolution" value="1000" units="1/cm"/>
+          <inkml:channelProperty channel="Y" name="resolution" value="1000" units="1/cm"/>
+        </inkml:channelProperties>
+      </inkml:inkSource>
+      <inkml:timestamp xml:id="ts0" timeString="2025-10-29T20:22:43.289"/>
+    </inkml:context>
+    <inkml:brush xml:id="br0">
+      <inkml:brushProperty name="width" value="0.05" units="cm"/>
+      <inkml:brushProperty name="height" value="0.05" units="cm"/>
+      <inkml:brushProperty name="color" value="#0B868D"/>
+      <inkml:brushProperty name="ignorePressure" value="1"/>
+      <inkml:brushProperty name="inkEffects" value="ocean"/>
+      <inkml:brushProperty name="anchorX" value="-109098.0625"/>
+      <inkml:brushProperty name="anchorY" value="-71049.83594"/>
+      <inkml:brushProperty name="scaleFactor" value="0.5"/>
+    </inkml:brush>
+  </inkml:definitions>
+  <inkml:trace contextRef="#ctx0" brushRef="#br0">2983 1,'0'0,"-18"0,-28 0,-24 0,-24 0,-17 0,-8 0,-7 0,-5 0,-2 0,10 0,0 0,0 0,3 0,4 0,4 0,7 0,3 0,1 0,0 0,5 0,3 0,0 0,9 0,13 0,2 0,8 5,3 1,8-1,8-1,6 0,-1-2,4-1,1-1,2 0,-3 0,0 0,1 10,7 1</inkml:trace>
+</inkml:ink>
+</file>
+
+<file path=ppt/ink/ink23.xml><?xml version="1.0" encoding="utf-8"?>
+<inkml:ink xmlns:inkml="http://www.w3.org/2003/InkML">
+  <inkml:definitions>
+    <inkml:context xml:id="ctx0">
+      <inkml:inkSource xml:id="inkSrc0">
+        <inkml:traceFormat>
+          <inkml:channel name="X" type="integer" min="-2.14748E9" max="2.14748E9" units="cm"/>
+          <inkml:channel name="Y" type="integer" min="-2.14748E9" max="2.14748E9" units="cm"/>
+        </inkml:traceFormat>
+        <inkml:channelProperties>
+          <inkml:channelProperty channel="X" name="resolution" value="1000" units="1/cm"/>
+          <inkml:channelProperty channel="Y" name="resolution" value="1000" units="1/cm"/>
+        </inkml:channelProperties>
+      </inkml:inkSource>
+      <inkml:timestamp xml:id="ts0" timeString="2025-10-29T20:22:49.315"/>
+    </inkml:context>
+    <inkml:brush xml:id="br0">
+      <inkml:brushProperty name="width" value="0.5" units="cm"/>
+      <inkml:brushProperty name="height" value="1" units="cm"/>
+      <inkml:brushProperty name="color" value="#A2D762"/>
+      <inkml:brushProperty name="tip" value="rectangle"/>
+      <inkml:brushProperty name="rasterOp" value="maskPen"/>
+      <inkml:brushProperty name="ignorePressure" value="1"/>
+    </inkml:brush>
+  </inkml:definitions>
+  <inkml:trace contextRef="#ctx0" brushRef="#br0">195 132,'2'0,"0"0,-1 1,1 0,-1-1,1 1,-1 0,1-1,-1 1,0 0,1 0,-1 0,2 2,10 7,20 4,1-2,1-1,-1-2,69 9,-15-2,71 18,439 78,-395-83,128 14,223-16,-510-26,41-1,-77 0,-1-1,1 0,-1 0,0-1,1 0,-1 0,0-1,8-4,-14 7,-1 0,0 0,0-1,0 1,0 0,0 0,0 0,1 0,-1-1,0 1,0 0,0 0,0 0,0-1,0 1,0 0,0 0,0 0,0-1,0 1,0 0,0 0,0 0,0-1,0 1,0 0,0 0,0 0,0-1,0 1,0 0,0 0,0 0,-1 0,1-1,0 1,0 0,0 0,0 0,0 0,-1-1,1 1,0 0,0 0,0 0,0 0,-1 0,1 0,0 0,0 0,0 0,-1 0,1-1,0 1,0 0,0 0,-1 0,1 0,0 0,-1 1,-16-8,15 7,-33-8,-1 1,1 2,-58 0,-21-4,-147-8,94 8,-134-22,59 6,60 16,51 4,128 5,-1-1,1 1,0-1,-1 1,1-1,0 0,-7-3,10 4,0 0,0 0,0 0,0 0,0 0,0 0,-1-1,1 1,0 0,0 0,0 0,0 0,0 0,0 0,0 0,0 0,0-1,-1 1,1 0,0 0,0 0,0 0,0 0,0 0,0-1,0 1,0 0,0 0,0 0,0 0,0 0,0 0,0-1,0 1,0 0,0 0,0 0,0 0,0 0,1 0,-1-1,0 1,0 0,0 0,0 0,0 0,0 0,0 0,0 0,0 0,1-1,-1 1,0 0,19-5,81-5,-68 9,0-2,0-2,0 0,43-15,-73 20,0-1,0 0,0 0,0 0,0 0,-1 0,1 0,0 0,0-1,-1 1,1-1,-1 1,1-1,-1 0,0 1,0-1,0 0,0 0,0 0,0 0,1-3,-2 4,0-1,0 0,0 0,0 0,-1 0,1 0,0 1,-1-1,1 0,-1 0,0 1,0-1,0 0,1 1,-1-1,-1 1,1-1,0 1,0-1,-1 1,1 0,0-1,-1 1,1 0,-4-1,-6-5,-1 0,-1 1,1 0,-1 1,-23-6,-73-9,5 0,22 0,-2 3,-1 3,-106-2,-339-10,760 62,21 21,-50-4,137 29,-128-39,289 47,-416-81,240 38,-175-23,-82-15,84 23,-96-18,-54-14,0 0,0 0,0 1,0-1,0 0,0 0,0 0,-1 0,1 0,0 0,0 0,0 0,0 0,0 0,0 0,0 0,0 0,0 0,0 1,0-1,0 0,0 0,0 0,0 0,0 0,0 0,0 0,0 0,0 0,0 0,0 0,0 0,0 1,0-1,0 0,1 0,-1 0,0 0,0 0,0 0,0 0,0 0,0 0,0 0,0 0,0 0,0 0,0 0,0 0,0 0,0 0,0 0,1 0,-14 3,-20-1,-24-5,1-2,-102-24,94 16,-805-164,830 169,-73-16,99 18,15 3,22 0,344 3,-183 3,18-4,395 19,-560-14,-26 0,-28-3,-21-5,-1-1,1-3,-61-19,21 6,-32-7,-356-99,442 121,-1 1,0 0,-49-1,-74 9,49 0,41-3</inkml:trace>
+</inkml:ink>
+</file>
+
+<file path=ppt/ink/ink24.xml><?xml version="1.0" encoding="utf-8"?>
+<inkml:ink xmlns:inkml="http://www.w3.org/2003/InkML">
+  <inkml:definitions>
+    <inkml:context xml:id="ctx0">
+      <inkml:inkSource xml:id="inkSrc0">
+        <inkml:traceFormat>
+          <inkml:channel name="X" type="integer" min="-2.14748E9" max="2.14748E9" units="cm"/>
+          <inkml:channel name="Y" type="integer" min="-2.14748E9" max="2.14748E9" units="cm"/>
+        </inkml:traceFormat>
+        <inkml:channelProperties>
+          <inkml:channelProperty channel="X" name="resolution" value="1000" units="1/cm"/>
+          <inkml:channelProperty channel="Y" name="resolution" value="1000" units="1/cm"/>
+        </inkml:channelProperties>
+      </inkml:inkSource>
+      <inkml:timestamp xml:id="ts0" timeString="2025-10-08T19:04:54.910"/>
+    </inkml:context>
+    <inkml:brush xml:id="br0">
+      <inkml:brushProperty name="width" value="0.05" units="cm"/>
+      <inkml:brushProperty name="height" value="0.05" units="cm"/>
+      <inkml:brushProperty name="color" value="#0B868D"/>
+      <inkml:brushProperty name="ignorePressure" value="1"/>
+      <inkml:brushProperty name="inkEffects" value="ocean"/>
+      <inkml:brushProperty name="anchorX" value="-31110.55273"/>
+      <inkml:brushProperty name="anchorY" value="-18329.00586"/>
+      <inkml:brushProperty name="scaleFactor" value="0.5"/>
+    </inkml:brush>
+  </inkml:definitions>
+  <inkml:trace contextRef="#ctx0" brushRef="#br0">0 1,'0'0,"5"0,1 0</inkml:trace>
+</inkml:ink>
+</file>
+
+<file path=ppt/ink/ink25.xml><?xml version="1.0" encoding="utf-8"?>
+<inkml:ink xmlns:inkml="http://www.w3.org/2003/InkML">
+  <inkml:definitions>
+    <inkml:context xml:id="ctx0">
+      <inkml:inkSource xml:id="inkSrc0">
+        <inkml:traceFormat>
+          <inkml:channel name="X" type="integer" min="-2.14748E9" max="2.14748E9" units="cm"/>
+          <inkml:channel name="Y" type="integer" min="-2.14748E9" max="2.14748E9" units="cm"/>
+        </inkml:traceFormat>
+        <inkml:channelProperties>
+          <inkml:channelProperty channel="X" name="resolution" value="1000" units="1/cm"/>
+          <inkml:channelProperty channel="Y" name="resolution" value="1000" units="1/cm"/>
+        </inkml:channelProperties>
+      </inkml:inkSource>
+      <inkml:timestamp xml:id="ts0" timeString="2025-10-29T20:23:30.696"/>
+    </inkml:context>
+    <inkml:brush xml:id="br0">
+      <inkml:brushProperty name="width" value="0.05" units="cm"/>
+      <inkml:brushProperty name="height" value="0.05" units="cm"/>
+      <inkml:brushProperty name="color" value="#0B868D"/>
+      <inkml:brushProperty name="ignorePressure" value="1"/>
+      <inkml:brushProperty name="inkEffects" value="ocean"/>
+      <inkml:brushProperty name="anchorX" value="-105100.05469"/>
+      <inkml:brushProperty name="anchorY" value="-70081.64063"/>
+      <inkml:brushProperty name="scaleFactor" value="0.5"/>
+    </inkml:brush>
+  </inkml:definitions>
+  <inkml:trace contextRef="#ctx0" brushRef="#br0">1 161,'0'0,"4"0,13 0,15-5,10-1,13 1,5 1,12 0,16-3,19 1,19-6,19 2,17 2,16-9,14 2,21 1,17 4,26 4,15-3,19 1,17 3,20 0,11 3,13 0,14 2,12 0,9 0,6 0,0 1,-5-1,-9 0,-10 0,-19 0,-8 0,-21 0,-17 0,-26 0,-22 0,-24 0,-56 0</inkml:trace>
+</inkml:ink>
+</file>
+
+<file path=ppt/ink/ink26.xml><?xml version="1.0" encoding="utf-8"?>
+<inkml:ink xmlns:inkml="http://www.w3.org/2003/InkML">
+  <inkml:definitions>
+    <inkml:context xml:id="ctx0">
+      <inkml:inkSource xml:id="inkSrc0">
+        <inkml:traceFormat>
+          <inkml:channel name="X" type="integer" min="-2.14748E9" max="2.14748E9" units="cm"/>
+          <inkml:channel name="Y" type="integer" min="-2.14748E9" max="2.14748E9" units="cm"/>
+        </inkml:traceFormat>
+        <inkml:channelProperties>
+          <inkml:channelProperty channel="X" name="resolution" value="1000" units="1/cm"/>
+          <inkml:channelProperty channel="Y" name="resolution" value="1000" units="1/cm"/>
+        </inkml:channelProperties>
+      </inkml:inkSource>
+      <inkml:timestamp xml:id="ts0" timeString="2025-10-29T20:23:31.738"/>
+    </inkml:context>
+    <inkml:brush xml:id="br0">
+      <inkml:brushProperty name="width" value="0.05" units="cm"/>
+      <inkml:brushProperty name="height" value="0.05" units="cm"/>
+      <inkml:brushProperty name="color" value="#0B868D"/>
+      <inkml:brushProperty name="ignorePressure" value="1"/>
+      <inkml:brushProperty name="inkEffects" value="ocean"/>
+      <inkml:brushProperty name="anchorX" value="-115275.17969"/>
+      <inkml:brushProperty name="anchorY" value="-70938.89844"/>
+      <inkml:brushProperty name="scaleFactor" value="0.5"/>
+    </inkml:brush>
+  </inkml:definitions>
+  <inkml:trace contextRef="#ctx0" brushRef="#br0">0 1,'0'0,"13"0,11 0,19 0,8 0,17 0,13 0,5 0,3 0,5 0,-2 0,9 0,18 0,8 0,13 0,8 0,16 0,5 0,7 0,4 0,-2 0,2 0,6 0,-4 0,-4 0,0 0,-6 0,-8 0,-10 0,-8 0,-6 0,-11 0,-28 0</inkml:trace>
+</inkml:ink>
+</file>
+
+<file path=ppt/ink/ink27.xml><?xml version="1.0" encoding="utf-8"?>
+<inkml:ink xmlns:inkml="http://www.w3.org/2003/InkML">
+  <inkml:definitions>
+    <inkml:context xml:id="ctx0">
+      <inkml:inkSource xml:id="inkSrc0">
+        <inkml:traceFormat>
+          <inkml:channel name="X" type="integer" min="-2.14748E9" max="2.14748E9" units="cm"/>
+          <inkml:channel name="Y" type="integer" min="-2.14748E9" max="2.14748E9" units="cm"/>
+        </inkml:traceFormat>
+        <inkml:channelProperties>
+          <inkml:channelProperty channel="X" name="resolution" value="1000" units="1/cm"/>
+          <inkml:channelProperty channel="Y" name="resolution" value="1000" units="1/cm"/>
+        </inkml:channelProperties>
+      </inkml:inkSource>
+      <inkml:timestamp xml:id="ts0" timeString="2025-10-29T20:23:43.209"/>
+    </inkml:context>
+    <inkml:brush xml:id="br0">
+      <inkml:brushProperty name="width" value="0.05" units="cm"/>
+      <inkml:brushProperty name="height" value="0.05" units="cm"/>
+      <inkml:brushProperty name="color" value="#0B868D"/>
+      <inkml:brushProperty name="ignorePressure" value="1"/>
+      <inkml:brushProperty name="inkEffects" value="ocean"/>
+      <inkml:brushProperty name="anchorX" value="-120344.14844"/>
+      <inkml:brushProperty name="anchorY" value="-71954.89844"/>
+      <inkml:brushProperty name="scaleFactor" value="0.5"/>
+    </inkml:brush>
+  </inkml:definitions>
+  <inkml:trace contextRef="#ctx0" brushRef="#br0">0 1,'0'0,"9"0,9 0,8 0,10 0,2 0,5 0,4 0,2 0,-3 0,1 0,1 0,-4 0,6 0,2 0,6 0,2 0,10 0,10 0,-2 0,3 0,-6 0,5 0,11 0,6 0,11 0,8 0,7 0,6 5,3 1,1-1,1-1,5 0,1-2,-2-1,0-1,-2 0,-1 0,-2 0,0 0,-1-1,0 1,0 0,0 0,0 0,-5 0,0 0,0 5,0 1,-3-1,-10 0,1-2,-4 4,-1 0,-2-2,-7 0,-6-2,0-1,-10-1,-14-1,-3 0,-12 0,-10-1,-2 1,-11 0</inkml:trace>
+</inkml:ink>
+</file>
+
+<file path=ppt/ink/ink28.xml><?xml version="1.0" encoding="utf-8"?>
+<inkml:ink xmlns:inkml="http://www.w3.org/2003/InkML">
+  <inkml:definitions>
+    <inkml:context xml:id="ctx0">
+      <inkml:inkSource xml:id="inkSrc0">
+        <inkml:traceFormat>
+          <inkml:channel name="X" type="integer" min="-2.14748E9" max="2.14748E9" units="cm"/>
+          <inkml:channel name="Y" type="integer" min="-2.14748E9" max="2.14748E9" units="cm"/>
+        </inkml:traceFormat>
+        <inkml:channelProperties>
+          <inkml:channelProperty channel="X" name="resolution" value="1000" units="1/cm"/>
+          <inkml:channelProperty channel="Y" name="resolution" value="1000" units="1/cm"/>
+        </inkml:channelProperties>
+      </inkml:inkSource>
+      <inkml:timestamp xml:id="ts0" timeString="2025-10-29T20:28:29.696"/>
+    </inkml:context>
+    <inkml:brush xml:id="br0">
+      <inkml:brushProperty name="width" value="0.05" units="cm"/>
+      <inkml:brushProperty name="height" value="0.05" units="cm"/>
+      <inkml:brushProperty name="color" value="#0B868D"/>
+      <inkml:brushProperty name="ignorePressure" value="1"/>
+      <inkml:brushProperty name="inkEffects" value="ocean"/>
+      <inkml:brushProperty name="anchorX" value="-27284.03516"/>
+      <inkml:brushProperty name="anchorY" value="-38826.03516"/>
+      <inkml:brushProperty name="scaleFactor" value="0.5"/>
+    </inkml:brush>
+  </inkml:definitions>
+  <inkml:trace contextRef="#ctx0" brushRef="#br0">0 0,'0'0</inkml:trace>
+</inkml:ink>
+</file>
+
+<file path=ppt/ink/ink29.xml><?xml version="1.0" encoding="utf-8"?>
+<inkml:ink xmlns:inkml="http://www.w3.org/2003/InkML">
+  <inkml:definitions>
+    <inkml:context xml:id="ctx0">
+      <inkml:inkSource xml:id="inkSrc0">
+        <inkml:traceFormat>
+          <inkml:channel name="X" type="integer" min="-2.14748E9" max="2.14748E9" units="cm"/>
+          <inkml:channel name="Y" type="integer" min="-2.14748E9" max="2.14748E9" units="cm"/>
+        </inkml:traceFormat>
+        <inkml:channelProperties>
+          <inkml:channelProperty channel="X" name="resolution" value="1000" units="1/cm"/>
+          <inkml:channelProperty channel="Y" name="resolution" value="1000" units="1/cm"/>
+        </inkml:channelProperties>
+      </inkml:inkSource>
+      <inkml:timestamp xml:id="ts0" timeString="2025-10-29T20:28:40.335"/>
+    </inkml:context>
+    <inkml:brush xml:id="br0">
+      <inkml:brushProperty name="width" value="0.05" units="cm"/>
+      <inkml:brushProperty name="height" value="0.05" units="cm"/>
+      <inkml:brushProperty name="color" value="#0B868D"/>
+      <inkml:brushProperty name="ignorePressure" value="1"/>
+      <inkml:brushProperty name="inkEffects" value="ocean"/>
+      <inkml:brushProperty name="anchorX" value="-28300.03516"/>
+      <inkml:brushProperty name="anchorY" value="-39842.03516"/>
+      <inkml:brushProperty name="scaleFactor" value="0.5"/>
+    </inkml:brush>
+  </inkml:definitions>
+  <inkml:trace contextRef="#ctx0" brushRef="#br0">1 1,'0'0</inkml:trace>
+</inkml:ink>
+</file>
+
+<file path=ppt/ink/ink3.xml><?xml version="1.0" encoding="utf-8"?>
+<inkml:ink xmlns:inkml="http://www.w3.org/2003/InkML">
+  <inkml:definitions>
+    <inkml:context xml:id="ctx0">
+      <inkml:inkSource xml:id="inkSrc0">
+        <inkml:traceFormat>
+          <inkml:channel name="X" type="integer" min="-2.14748E9" max="2.14748E9" units="cm"/>
+          <inkml:channel name="Y" type="integer" min="-2.14748E9" max="2.14748E9" units="cm"/>
+        </inkml:traceFormat>
+        <inkml:channelProperties>
+          <inkml:channelProperty channel="X" name="resolution" value="1000" units="1/cm"/>
+          <inkml:channelProperty channel="Y" name="resolution" value="1000" units="1/cm"/>
+        </inkml:channelProperties>
+      </inkml:inkSource>
+      <inkml:timestamp xml:id="ts0" timeString="2025-10-29T20:18:33.213"/>
+    </inkml:context>
+    <inkml:brush xml:id="br0">
+      <inkml:brushProperty name="width" value="0.05" units="cm"/>
+      <inkml:brushProperty name="height" value="0.05" units="cm"/>
+      <inkml:brushProperty name="color" value="#0B868D"/>
+      <inkml:brushProperty name="ignorePressure" value="1"/>
+      <inkml:brushProperty name="inkEffects" value="ocean"/>
+      <inkml:brushProperty name="anchorX" value="0"/>
+      <inkml:brushProperty name="anchorY" value="0"/>
+      <inkml:brushProperty name="scaleFactor" value="0.5"/>
+    </inkml:brush>
+  </inkml:definitions>
+  <inkml:trace contextRef="#ctx0" brushRef="#br0">1 134,'0'0,"4"0,8 0,9 0,10 0,9 0,12 0,4 0,-2 0,4 0,11 0,-1 0,5 0,2 0,2 0,7 0,1 0,0 0,5-5,-7-1,4 0,-7 2,-1-10,-7 1,-6 1,-4 3,-11 2,-1 3,-8 2,-5-4,-5 1,2 0,-1 1,-2 2,-1 0,4 1,-1 1,0 0,-2 0,3 0,0 1,-1-1,-2 0,4 0,-2 0,0 0,-2 0,-7-5,4-1,0 1,-1 0,1 2,5 1,-1 1,1 1,-2 0,4 0,-1 0,-1 0,-2 0,4 1,-1-1,-2 0,0 0,2 0,0 0,-1 0,-2 0,-7 0,-6 0</inkml:trace>
+</inkml:ink>
+</file>
+
+<file path=ppt/ink/ink4.xml><?xml version="1.0" encoding="utf-8"?>
+<inkml:ink xmlns:inkml="http://www.w3.org/2003/InkML">
+  <inkml:definitions>
+    <inkml:context xml:id="ctx0">
+      <inkml:inkSource xml:id="inkSrc0">
+        <inkml:traceFormat>
+          <inkml:channel name="X" type="integer" min="-2.14748E9" max="2.14748E9" units="cm"/>
+          <inkml:channel name="Y" type="integer" min="-2.14748E9" max="2.14748E9" units="cm"/>
+        </inkml:traceFormat>
+        <inkml:channelProperties>
+          <inkml:channelProperty channel="X" name="resolution" value="1000" units="1/cm"/>
+          <inkml:channelProperty channel="Y" name="resolution" value="1000" units="1/cm"/>
+        </inkml:channelProperties>
+      </inkml:inkSource>
+      <inkml:timestamp xml:id="ts0" timeString="2025-10-29T20:18:58.444"/>
+    </inkml:context>
+    <inkml:brush xml:id="br0">
+      <inkml:brushProperty name="width" value="0.05" units="cm"/>
+      <inkml:brushProperty name="height" value="0.05" units="cm"/>
+      <inkml:brushProperty name="color" value="#0B868D"/>
+      <inkml:brushProperty name="ignorePressure" value="1"/>
+      <inkml:brushProperty name="inkEffects" value="ocean"/>
+      <inkml:brushProperty name="anchorX" value="-11194.03711"/>
+      <inkml:brushProperty name="anchorY" value="-9025.62305"/>
+      <inkml:brushProperty name="scaleFactor" value="0.5"/>
+    </inkml:brush>
+  </inkml:definitions>
+  <inkml:trace contextRef="#ctx0" brushRef="#br0">5661 923,'0'0,"-5"0,-12 0,-15 0,-10 0,-18 0,-5 0,-13 0,-9 0,3 0,-1 0,-3 0,-9 0,-11 0,-8 0,-8 5,-10 11,-9 5,-7 5,-15 3,-9-6,-13 6,-4 0,-7 0,0-1,-4-5,-8 5,3-1,-2-5,4 1,11-6,4 0,10-4,13-3,11-4,10-3,13-2,15 0,14-2,21 0,8 1,16-1,11 1,10-1,2 1,-2 0,2 0,-3 0,2 0,1 0,4 0,6-5,25 3,-1 2,1-1,-1 0,0 0,1-1,0 1,-1 0,1 0,0-1,-3-2,-7-17,13 21,-2-2,0 1,1 0,-1-1,0 1,0 0,1-1,-1 1,1 0,-1 0,1-1,0 1,-1 0,1 0,1-2,18-25,7-6,14-2,7-4,15-5,4-3,5 3,-2-1,3 3,6 0,2-2,7-2,5-8,6-1,-2-6,2-1,1-4,-8 2,-4-4,-10 9,-3 2,-12 4,-11 6,-4 7,-13 6,-16 9,-19 25,0 1,0-1,1 0,-1 1,0-1,0 0,0 1,0-1,1 0,-1 1,0-1,0 0,0 1,0-1,0 0,-1 1,1-1,0 0,0 1,0-1,-1 0,1 1,0-1,-1-1,0 2,0 0,0-1,0 0,0 1,1-1,-1 1,-1 0,1-1,0 1,0 0,0 0,0-1,0 1,0 0,0 0,0 0,-1 0,-33 11,-15 15,-6 6,-15 14,-1 5,-9 10,-8 12,-6 0,0 9,2-9,9-10,-2 0,-3-5,-4 3,1-1,2 3,7-5,4-8,13-2,11-6,5-11,15-4,5-8,20-7,10-12,0 1,0-1,0 0,1 0,-1 1,0-1,0 0,0 1,0-1,0 0,1 0,-1 1,0-1,0 0,0 0,1 1,-1-1,0 0,0 0,1 0,-1 0,0 1,0-1,1 0,-1 0,0 0,1 0,-1 0,0 0,1 0,-1 0,0 0,0 0,1 0,35 8,24-2,9-1,15-2,13 10,13-1,15 4,18-1,10-4,7 3,14-4,1-1,-1-4,-2 4,6-2,-3-2,-2 0,-9-2,-15-2,-14 0,-11-1,-25 0,-23-1,-67 3,0-1,0 1,16 4,5 5</inkml:trace>
+</inkml:ink>
+</file>
+
+<file path=ppt/ink/ink5.xml><?xml version="1.0" encoding="utf-8"?>
+<inkml:ink xmlns:inkml="http://www.w3.org/2003/InkML">
+  <inkml:definitions>
+    <inkml:context xml:id="ctx0">
+      <inkml:inkSource xml:id="inkSrc0">
+        <inkml:traceFormat>
+          <inkml:channel name="X" type="integer" min="-2.14748E9" max="2.14748E9" units="cm"/>
+          <inkml:channel name="Y" type="integer" min="-2.14748E9" max="2.14748E9" units="cm"/>
+        </inkml:traceFormat>
+        <inkml:channelProperties>
+          <inkml:channelProperty channel="X" name="resolution" value="1000" units="1/cm"/>
+          <inkml:channelProperty channel="Y" name="resolution" value="1000" units="1/cm"/>
+        </inkml:channelProperties>
+      </inkml:inkSource>
+      <inkml:timestamp xml:id="ts0" timeString="2025-10-29T20:19:13.384"/>
+    </inkml:context>
+    <inkml:brush xml:id="br0">
+      <inkml:brushProperty name="width" value="0.05" units="cm"/>
+      <inkml:brushProperty name="height" value="0.05" units="cm"/>
+      <inkml:brushProperty name="color" value="#0B868D"/>
+      <inkml:brushProperty name="ignorePressure" value="1"/>
+      <inkml:brushProperty name="inkEffects" value="ocean"/>
+      <inkml:brushProperty name="anchorX" value="-12095.33691"/>
+      <inkml:brushProperty name="anchorY" value="-20176.0293"/>
+      <inkml:brushProperty name="scaleFactor" value="0.5"/>
+    </inkml:brush>
+  </inkml:definitions>
+  <inkml:trace contextRef="#ctx0" brushRef="#br0">853 617,'0'0,"0"5,0 6,0 15,0 11,0 14,0 5,0 14,0 1,0 9,0 8,0-4,0 5,0 4,0-7,0-1,0-9,0-2,0-11,0-10,0-5,0-7,0-16,0-15,0-14,0-26,0-14,-11-15,-5-4,-6-13,-13-9,-9-14,-10-12,-5-14,-7-12,-4-16,-10-7,-9-3,4-2,1-5,6 6,18 34</inkml:trace>
+</inkml:ink>
+</file>
+
+<file path=ppt/ink/ink6.xml><?xml version="1.0" encoding="utf-8"?>
+<inkml:ink xmlns:inkml="http://www.w3.org/2003/InkML">
+  <inkml:definitions>
+    <inkml:context xml:id="ctx0">
+      <inkml:inkSource xml:id="inkSrc0">
+        <inkml:traceFormat>
+          <inkml:channel name="X" type="integer" min="-2.14748E9" max="2.14748E9" units="cm"/>
+          <inkml:channel name="Y" type="integer" min="-2.14748E9" max="2.14748E9" units="cm"/>
+        </inkml:traceFormat>
+        <inkml:channelProperties>
+          <inkml:channelProperty channel="X" name="resolution" value="1000" units="1/cm"/>
+          <inkml:channelProperty channel="Y" name="resolution" value="1000" units="1/cm"/>
+        </inkml:channelProperties>
+      </inkml:inkSource>
+      <inkml:timestamp xml:id="ts0" timeString="2025-10-29T20:19:13.517"/>
+    </inkml:context>
+    <inkml:brush xml:id="br0">
+      <inkml:brushProperty name="width" value="0.05" units="cm"/>
+      <inkml:brushProperty name="height" value="0.05" units="cm"/>
+      <inkml:brushProperty name="color" value="#0B868D"/>
+      <inkml:brushProperty name="ignorePressure" value="1"/>
+      <inkml:brushProperty name="inkEffects" value="ocean"/>
+      <inkml:brushProperty name="anchorX" value="-10227.05078"/>
+      <inkml:brushProperty name="anchorY" value="-18543.67188"/>
+      <inkml:brushProperty name="scaleFactor" value="0.5"/>
+    </inkml:brush>
+  </inkml:definitions>
+  <inkml:trace contextRef="#ctx0" brushRef="#br0">0 1,'0'0,"0"4,0 8,5 14,6 6,0 8,4 11,9 4,3 8,2 0,1 11,-6-13</inkml:trace>
+</inkml:ink>
+</file>
+
+<file path=ppt/ink/ink7.xml><?xml version="1.0" encoding="utf-8"?>
+<inkml:ink xmlns:inkml="http://www.w3.org/2003/InkML">
+  <inkml:definitions>
+    <inkml:context xml:id="ctx0">
+      <inkml:inkSource xml:id="inkSrc0">
+        <inkml:traceFormat>
+          <inkml:channel name="X" type="integer" min="-2.14748E9" max="2.14748E9" units="cm"/>
+          <inkml:channel name="Y" type="integer" min="-2.14748E9" max="2.14748E9" units="cm"/>
+        </inkml:traceFormat>
+        <inkml:channelProperties>
+          <inkml:channelProperty channel="X" name="resolution" value="1000" units="1/cm"/>
+          <inkml:channelProperty channel="Y" name="resolution" value="1000" units="1/cm"/>
+        </inkml:channelProperties>
+      </inkml:inkSource>
+      <inkml:timestamp xml:id="ts0" timeString="2025-10-29T20:19:14.109"/>
+    </inkml:context>
+    <inkml:brush xml:id="br0">
+      <inkml:brushProperty name="width" value="0.05" units="cm"/>
+      <inkml:brushProperty name="height" value="0.05" units="cm"/>
+      <inkml:brushProperty name="color" value="#0B868D"/>
+      <inkml:brushProperty name="ignorePressure" value="1"/>
+      <inkml:brushProperty name="inkEffects" value="ocean"/>
+      <inkml:brushProperty name="anchorX" value="-11418.83594"/>
+      <inkml:brushProperty name="anchorY" value="-20040.90625"/>
+      <inkml:brushProperty name="scaleFactor" value="0.5"/>
+    </inkml:brush>
+  </inkml:definitions>
+  <inkml:trace contextRef="#ctx0" brushRef="#br0">0 1,'0'0,"0"9,5 9,1 9,-1 9,5 12,-2 12,10 2,4 13,3 8,-3-1,1 6,5 5,1 4,1-7,-6-3,0-8,4-4,-5-11,1-11,-6-10,-5-2,-4-17,-4-13,-4-24,0-17,-2-18,0-9,0-9,0-1,1-9,-1 2,1-2,0 4,0 0,0 4,5-1,1 9,5 8,-1 4,-1 7,8 10,3 4,4 9,-23 19,0-1,0-1,1 1,-1-1,0 1,1 0,-1-1,1 1,-1 0,0 0,1 0,-1 0,3 1,18 9,-5 9,6 16,-4 4,2 1,-5 9,2-3,-5 3,-2 0,0-3,-2-5,-2-5,-2 1,9-2,-2-2,5-8,2-7,-19-19,1 2,0-1,0 0,0 1,0-1,0 0,0 0,-1 1,1-1,0 0,0 0,0 0,0 0,0 0,0 0,0 0,1-1,0 0,0 0,0 0,-1 0,1 0,-1 0,1 0,-1-1,1 1,-1 0,2-3,22-31,-2-1</inkml:trace>
+</inkml:ink>
+</file>
+
+<file path=ppt/ink/ink8.xml><?xml version="1.0" encoding="utf-8"?>
+<inkml:ink xmlns:inkml="http://www.w3.org/2003/InkML">
+  <inkml:definitions>
+    <inkml:context xml:id="ctx0">
+      <inkml:inkSource xml:id="inkSrc0">
+        <inkml:traceFormat>
+          <inkml:channel name="X" type="integer" min="-2.14748E9" max="2.14748E9" units="cm"/>
+          <inkml:channel name="Y" type="integer" min="-2.14748E9" max="2.14748E9" units="cm"/>
+        </inkml:traceFormat>
+        <inkml:channelProperties>
+          <inkml:channelProperty channel="X" name="resolution" value="1000" units="1/cm"/>
+          <inkml:channelProperty channel="Y" name="resolution" value="1000" units="1/cm"/>
+        </inkml:channelProperties>
+      </inkml:inkSource>
+      <inkml:timestamp xml:id="ts0" timeString="2025-10-29T20:19:14.550"/>
+    </inkml:context>
+    <inkml:brush xml:id="br0">
+      <inkml:brushProperty name="width" value="0.05" units="cm"/>
+      <inkml:brushProperty name="height" value="0.05" units="cm"/>
+      <inkml:brushProperty name="color" value="#0B868D"/>
+      <inkml:brushProperty name="ignorePressure" value="1"/>
+      <inkml:brushProperty name="inkEffects" value="ocean"/>
+      <inkml:brushProperty name="anchorX" value="-13291.37988"/>
+      <inkml:brushProperty name="anchorY" value="-21857.58203"/>
+      <inkml:brushProperty name="scaleFactor" value="0.5"/>
+    </inkml:brush>
+  </inkml:definitions>
+  <inkml:trace contextRef="#ctx0" brushRef="#br0">445 0,'0'0,"0"5,0 12,5 10,1 20,5 8,-1 17,-2 6,9-1,4 7,3 5,-3 1,0 4,7 4,1 3,1-3,-1 1,5-15,-5-3,-1-16,-7-11,-7-6,1-14,-5-4,3-11,7-6,4-7,-2-8,-5-8,-4-8,-5-14,-9-5,-8-6,-23-15,-11-14,-14-2,-10-5,-13-6,-9 4,2-5,-4 6,1 1,8 12,12 0,9 11,16 8,9 14,13 6,14 9,10 18,-1 1,0-1,0 1,0-1,0 1,0 0,0-1,0 1,1-1,-1 1,0-1,0 1,1-1,-1 1,0 0,0-1,1 1,-1-1,1 1,-1 0,0 0,1-1,-1 1,1 0,-1 0,0-1,2 1,33-17,23 4,10 2,14 3,15 3,12 3,-15 1</inkml:trace>
+</inkml:ink>
+</file>
+
+<file path=ppt/ink/ink9.xml><?xml version="1.0" encoding="utf-8"?>
+<inkml:ink xmlns:inkml="http://www.w3.org/2003/InkML">
+  <inkml:definitions>
+    <inkml:context xml:id="ctx0">
+      <inkml:inkSource xml:id="inkSrc0">
+        <inkml:traceFormat>
+          <inkml:channel name="X" type="integer" min="-2.14748E9" max="2.14748E9" units="cm"/>
+          <inkml:channel name="Y" type="integer" min="-2.14748E9" max="2.14748E9" units="cm"/>
+        </inkml:traceFormat>
+        <inkml:channelProperties>
+          <inkml:channelProperty channel="X" name="resolution" value="1000" units="1/cm"/>
+          <inkml:channelProperty channel="Y" name="resolution" value="1000" units="1/cm"/>
+        </inkml:channelProperties>
+      </inkml:inkSource>
+      <inkml:timestamp xml:id="ts0" timeString="2025-10-29T20:19:37.648"/>
+    </inkml:context>
+    <inkml:brush xml:id="br0">
+      <inkml:brushProperty name="width" value="0.05" units="cm"/>
+      <inkml:brushProperty name="height" value="0.05" units="cm"/>
+      <inkml:brushProperty name="ignorePressure" value="1"/>
+    </inkml:brush>
+  </inkml:definitions>
+  <inkml:trace contextRef="#ctx0" brushRef="#br0">1 28,'205'-13,"-15"0,423 12,-281 2,-297-1</inkml:trace>
+</inkml:ink>
+</file>
+
 <file path=ppt/notesMasters/notesMaster1.xml><?xml version="1.0" encoding="utf-8"?>
 <p:notesMaster xmlns:a="http://schemas.openxmlformats.org/drawingml/2006/main" xmlns:r="http://schemas.openxmlformats.org/officeDocument/2006/relationships" xmlns:p="http://schemas.openxmlformats.org/presentationml/2006/main">
   <p:cSld>
@@ -211,7 +1093,7 @@
           <a:p>
             <a:fld id="{DD81528B-9B6F-4248-9BF4-341C8496BA36}" type="datetimeFigureOut">
               <a:rPr lang="uk-UA" smtClean="0"/>
-              <a:t>03.08.2025</a:t>
+              <a:t>29.10.2025</a:t>
             </a:fld>
             <a:endParaRPr lang="uk-UA"/>
           </a:p>
@@ -508,7 +1390,7 @@
         </p:nvSpPr>
         <p:spPr>
           <a:xfrm>
-            <a:off x="381300" y="685800"/>
+            <a:off x="381000" y="685800"/>
             <a:ext cx="6096000" cy="3429000"/>
           </a:xfrm>
           <a:custGeom>
@@ -612,7 +1494,7 @@
         </p:nvSpPr>
         <p:spPr>
           <a:xfrm>
-            <a:off x="381300" y="685800"/>
+            <a:off x="381000" y="685800"/>
             <a:ext cx="6096000" cy="3429000"/>
           </a:xfrm>
           <a:custGeom>
@@ -1354,7 +2236,7 @@
         </p:nvSpPr>
         <p:spPr>
           <a:xfrm>
-            <a:off x="381300" y="685800"/>
+            <a:off x="381000" y="685800"/>
             <a:ext cx="6096000" cy="3429000"/>
           </a:xfrm>
           <a:custGeom>
@@ -1458,7 +2340,7 @@
         </p:nvSpPr>
         <p:spPr>
           <a:xfrm>
-            <a:off x="381300" y="685800"/>
+            <a:off x="381000" y="685800"/>
             <a:ext cx="6096000" cy="3429000"/>
           </a:xfrm>
           <a:custGeom>
@@ -1562,7 +2444,7 @@
         </p:nvSpPr>
         <p:spPr>
           <a:xfrm>
-            <a:off x="381300" y="685800"/>
+            <a:off x="381000" y="685800"/>
             <a:ext cx="6096000" cy="3429000"/>
           </a:xfrm>
           <a:custGeom>
@@ -1666,7 +2548,7 @@
         </p:nvSpPr>
         <p:spPr>
           <a:xfrm>
-            <a:off x="381300" y="685800"/>
+            <a:off x="381000" y="685800"/>
             <a:ext cx="6096000" cy="3429000"/>
           </a:xfrm>
           <a:custGeom>
@@ -1770,7 +2652,7 @@
         </p:nvSpPr>
         <p:spPr>
           <a:xfrm>
-            <a:off x="381300" y="685800"/>
+            <a:off x="381000" y="685800"/>
             <a:ext cx="6096000" cy="3429000"/>
           </a:xfrm>
           <a:custGeom>
@@ -1874,7 +2756,7 @@
         </p:nvSpPr>
         <p:spPr>
           <a:xfrm>
-            <a:off x="381300" y="685800"/>
+            <a:off x="381000" y="685800"/>
             <a:ext cx="6096000" cy="3429000"/>
           </a:xfrm>
           <a:custGeom>
@@ -2098,7 +2980,7 @@
           <a:p>
             <a:fld id="{F1E3972C-1D59-4812-9879-0ADA85AB86FA}" type="datetimeFigureOut">
               <a:rPr lang="uk-UA" smtClean="0"/>
-              <a:t>03.08.2025</a:t>
+              <a:t>29.10.2025</a:t>
             </a:fld>
             <a:endParaRPr lang="uk-UA"/>
           </a:p>
@@ -2298,7 +3180,7 @@
           <a:p>
             <a:fld id="{F1E3972C-1D59-4812-9879-0ADA85AB86FA}" type="datetimeFigureOut">
               <a:rPr lang="uk-UA" smtClean="0"/>
-              <a:t>03.08.2025</a:t>
+              <a:t>29.10.2025</a:t>
             </a:fld>
             <a:endParaRPr lang="uk-UA"/>
           </a:p>
@@ -2508,7 +3390,7 @@
           <a:p>
             <a:fld id="{F1E3972C-1D59-4812-9879-0ADA85AB86FA}" type="datetimeFigureOut">
               <a:rPr lang="uk-UA" smtClean="0"/>
-              <a:t>03.08.2025</a:t>
+              <a:t>29.10.2025</a:t>
             </a:fld>
             <a:endParaRPr lang="uk-UA"/>
           </a:p>
@@ -3067,7 +3949,7 @@
           <a:p>
             <a:fld id="{F1E3972C-1D59-4812-9879-0ADA85AB86FA}" type="datetimeFigureOut">
               <a:rPr lang="uk-UA" smtClean="0"/>
-              <a:t>03.08.2025</a:t>
+              <a:t>29.10.2025</a:t>
             </a:fld>
             <a:endParaRPr lang="uk-UA"/>
           </a:p>
@@ -3343,7 +4225,7 @@
           <a:p>
             <a:fld id="{F1E3972C-1D59-4812-9879-0ADA85AB86FA}" type="datetimeFigureOut">
               <a:rPr lang="uk-UA" smtClean="0"/>
-              <a:t>03.08.2025</a:t>
+              <a:t>29.10.2025</a:t>
             </a:fld>
             <a:endParaRPr lang="uk-UA"/>
           </a:p>
@@ -3611,7 +4493,7 @@
           <a:p>
             <a:fld id="{F1E3972C-1D59-4812-9879-0ADA85AB86FA}" type="datetimeFigureOut">
               <a:rPr lang="uk-UA" smtClean="0"/>
-              <a:t>03.08.2025</a:t>
+              <a:t>29.10.2025</a:t>
             </a:fld>
             <a:endParaRPr lang="uk-UA"/>
           </a:p>
@@ -4026,7 +4908,7 @@
           <a:p>
             <a:fld id="{F1E3972C-1D59-4812-9879-0ADA85AB86FA}" type="datetimeFigureOut">
               <a:rPr lang="uk-UA" smtClean="0"/>
-              <a:t>03.08.2025</a:t>
+              <a:t>29.10.2025</a:t>
             </a:fld>
             <a:endParaRPr lang="uk-UA"/>
           </a:p>
@@ -4168,7 +5050,7 @@
           <a:p>
             <a:fld id="{F1E3972C-1D59-4812-9879-0ADA85AB86FA}" type="datetimeFigureOut">
               <a:rPr lang="uk-UA" smtClean="0"/>
-              <a:t>03.08.2025</a:t>
+              <a:t>29.10.2025</a:t>
             </a:fld>
             <a:endParaRPr lang="uk-UA"/>
           </a:p>
@@ -4281,7 +5163,7 @@
           <a:p>
             <a:fld id="{F1E3972C-1D59-4812-9879-0ADA85AB86FA}" type="datetimeFigureOut">
               <a:rPr lang="uk-UA" smtClean="0"/>
-              <a:t>03.08.2025</a:t>
+              <a:t>29.10.2025</a:t>
             </a:fld>
             <a:endParaRPr lang="uk-UA"/>
           </a:p>
@@ -4594,7 +5476,7 @@
           <a:p>
             <a:fld id="{F1E3972C-1D59-4812-9879-0ADA85AB86FA}" type="datetimeFigureOut">
               <a:rPr lang="uk-UA" smtClean="0"/>
-              <a:t>03.08.2025</a:t>
+              <a:t>29.10.2025</a:t>
             </a:fld>
             <a:endParaRPr lang="uk-UA"/>
           </a:p>
@@ -4883,7 +5765,7 @@
           <a:p>
             <a:fld id="{F1E3972C-1D59-4812-9879-0ADA85AB86FA}" type="datetimeFigureOut">
               <a:rPr lang="uk-UA" smtClean="0"/>
-              <a:t>03.08.2025</a:t>
+              <a:t>29.10.2025</a:t>
             </a:fld>
             <a:endParaRPr lang="uk-UA"/>
           </a:p>
@@ -5126,7 +6008,7 @@
           <a:p>
             <a:fld id="{F1E3972C-1D59-4812-9879-0ADA85AB86FA}" type="datetimeFigureOut">
               <a:rPr lang="uk-UA" smtClean="0"/>
-              <a:t>03.08.2025</a:t>
+              <a:t>29.10.2025</a:t>
             </a:fld>
             <a:endParaRPr lang="uk-UA"/>
           </a:p>
@@ -6534,8 +7416,8 @@
         </p:nvSpPr>
         <p:spPr>
           <a:xfrm>
-            <a:off x="78933" y="4183200"/>
-            <a:ext cx="4000000" cy="1969730"/>
+            <a:off x="78932" y="4183200"/>
+            <a:ext cx="6702867" cy="1323399"/>
           </a:xfrm>
           <a:prstGeom prst="rect">
             <a:avLst/>
@@ -6553,7 +7435,7 @@
           <a:p>
             <a:pPr marL="84665" marR="84665"/>
             <a:r>
-              <a:rPr lang="uk" sz="1400">
+              <a:rPr lang="uk" sz="1400" dirty="0">
                 <a:solidFill>
                   <a:srgbClr val="006699"/>
                 </a:solidFill>
@@ -6568,7 +7450,7 @@
               <a:t>int</a:t>
             </a:r>
             <a:r>
-              <a:rPr lang="uk" sz="1400">
+              <a:rPr lang="uk" sz="1400" dirty="0">
                 <a:solidFill>
                   <a:srgbClr val="188038"/>
                 </a:solidFill>
@@ -6582,7 +7464,7 @@
               </a:rPr>
               <a:t>[] numbers = { 1, 2, 3, 4, 5 };</a:t>
             </a:r>
-            <a:endParaRPr sz="1400">
+            <a:endParaRPr sz="1400" dirty="0">
               <a:solidFill>
                 <a:srgbClr val="188038"/>
               </a:solidFill>
@@ -6598,7 +7480,7 @@
           <a:p>
             <a:pPr marL="84665" marR="84665"/>
             <a:r>
-              <a:rPr lang="uk" sz="1400">
+              <a:rPr lang="uk" sz="1400" dirty="0">
                 <a:solidFill>
                   <a:srgbClr val="006699"/>
                 </a:solidFill>
@@ -6613,7 +7495,7 @@
               <a:t>for</a:t>
             </a:r>
             <a:r>
-              <a:rPr lang="uk" sz="1400">
+              <a:rPr lang="uk" sz="1400" dirty="0">
                 <a:solidFill>
                   <a:schemeClr val="dk1"/>
                 </a:solidFill>
@@ -6628,7 +7510,7 @@
               <a:t> </a:t>
             </a:r>
             <a:r>
-              <a:rPr lang="uk" sz="1400">
+              <a:rPr lang="uk" sz="1400" dirty="0">
                 <a:solidFill>
                   <a:srgbClr val="188038"/>
                 </a:solidFill>
@@ -6643,7 +7525,7 @@
               <a:t>(</a:t>
             </a:r>
             <a:r>
-              <a:rPr lang="uk" sz="1400">
+              <a:rPr lang="uk" sz="1400" dirty="0">
                 <a:solidFill>
                   <a:srgbClr val="006699"/>
                 </a:solidFill>
@@ -6658,7 +7540,7 @@
               <a:t>int</a:t>
             </a:r>
             <a:r>
-              <a:rPr lang="uk" sz="1400">
+              <a:rPr lang="uk" sz="1400" dirty="0">
                 <a:solidFill>
                   <a:schemeClr val="dk1"/>
                 </a:solidFill>
@@ -6673,7 +7555,7 @@
               <a:t> </a:t>
             </a:r>
             <a:r>
-              <a:rPr lang="uk" sz="1400">
+              <a:rPr lang="uk" sz="1400" dirty="0">
                 <a:solidFill>
                   <a:srgbClr val="188038"/>
                 </a:solidFill>
@@ -6687,7 +7569,7 @@
               </a:rPr>
               <a:t>i = 0; i &lt; numbers.Length; i++)</a:t>
             </a:r>
-            <a:endParaRPr sz="1400">
+            <a:endParaRPr sz="1400" dirty="0">
               <a:solidFill>
                 <a:srgbClr val="188038"/>
               </a:solidFill>
@@ -6703,7 +7585,7 @@
           <a:p>
             <a:pPr marL="84665" marR="84665"/>
             <a:r>
-              <a:rPr lang="uk" sz="1400">
+              <a:rPr lang="uk" sz="1400" dirty="0">
                 <a:solidFill>
                   <a:srgbClr val="188038"/>
                 </a:solidFill>
@@ -6717,7 +7599,7 @@
               </a:rPr>
               <a:t>{</a:t>
             </a:r>
-            <a:endParaRPr sz="1400">
+            <a:endParaRPr sz="1400" dirty="0">
               <a:solidFill>
                 <a:srgbClr val="188038"/>
               </a:solidFill>
@@ -6733,7 +7615,7 @@
           <a:p>
             <a:pPr marL="84665" marR="84665"/>
             <a:r>
-              <a:rPr lang="uk" sz="1400">
+              <a:rPr lang="uk" sz="1400" dirty="0">
                 <a:solidFill>
                   <a:srgbClr val="188038"/>
                 </a:solidFill>
@@ -6747,7 +7629,7 @@
               </a:rPr>
               <a:t>    Console.WriteLine(numbers[i]);</a:t>
             </a:r>
-            <a:endParaRPr sz="1400">
+            <a:endParaRPr sz="1400" dirty="0">
               <a:solidFill>
                 <a:srgbClr val="188038"/>
               </a:solidFill>
@@ -6763,7 +7645,7 @@
           <a:p>
             <a:pPr marL="84665" marR="84665"/>
             <a:r>
-              <a:rPr lang="uk" sz="1400">
+              <a:rPr lang="uk" sz="1400" dirty="0">
                 <a:solidFill>
                   <a:srgbClr val="188038"/>
                 </a:solidFill>
@@ -6777,7 +7659,7 @@
               </a:rPr>
               <a:t>}</a:t>
             </a:r>
-            <a:endParaRPr sz="1400">
+            <a:endParaRPr sz="1400" dirty="0">
               <a:solidFill>
                 <a:srgbClr val="188038"/>
               </a:solidFill>
@@ -6792,6 +7674,108 @@
           </a:p>
         </p:txBody>
       </p:sp>
+      <mc:AlternateContent xmlns:mc="http://schemas.openxmlformats.org/markup-compatibility/2006">
+        <mc:Choice xmlns:p14="http://schemas.microsoft.com/office/powerpoint/2010/main" xmlns:aink="http://schemas.microsoft.com/office/drawing/2016/ink" Requires="p14 aink">
+          <p:contentPart p14:bwMode="auto" r:id="rId3">
+            <p14:nvContentPartPr>
+              <p14:cNvPr id="2" name="Рукописні дані 1">
+                <a:extLst>
+                  <a:ext uri="{FF2B5EF4-FFF2-40B4-BE49-F238E27FC236}">
+                    <a16:creationId xmlns:a16="http://schemas.microsoft.com/office/drawing/2014/main" id="{A7C1D2A9-C7C3-43B8-AAAE-32D1AB138FEF}"/>
+                  </a:ext>
+                </a:extLst>
+              </p14:cNvPr>
+              <p14:cNvContentPartPr/>
+              <p14:nvPr/>
+            </p14:nvContentPartPr>
+            <p14:xfrm>
+              <a:off x="-543915" y="2104020"/>
+              <a:ext cx="3887640" cy="1135440"/>
+            </p14:xfrm>
+          </p:contentPart>
+        </mc:Choice>
+        <mc:Fallback>
+          <p:pic>
+            <p:nvPicPr>
+              <p:cNvPr id="2" name="Рукописні дані 1">
+                <a:extLst>
+                  <a:ext uri="{FF2B5EF4-FFF2-40B4-BE49-F238E27FC236}">
+                    <a16:creationId xmlns:a16="http://schemas.microsoft.com/office/drawing/2014/main" id="{A7C1D2A9-C7C3-43B8-AAAE-32D1AB138FEF}"/>
+                  </a:ext>
+                </a:extLst>
+              </p:cNvPr>
+              <p:cNvPicPr/>
+              <p:nvPr/>
+            </p:nvPicPr>
+            <p:blipFill>
+              <a:blip r:embed="rId4"/>
+              <a:stretch>
+                <a:fillRect/>
+              </a:stretch>
+            </p:blipFill>
+            <p:spPr>
+              <a:xfrm>
+                <a:off x="-552915" y="2095020"/>
+                <a:ext cx="3905280" cy="1153080"/>
+              </a:xfrm>
+              <a:prstGeom prst="rect">
+                <a:avLst/>
+              </a:prstGeom>
+            </p:spPr>
+          </p:pic>
+        </mc:Fallback>
+      </mc:AlternateContent>
+      <mc:AlternateContent xmlns:mc="http://schemas.openxmlformats.org/markup-compatibility/2006">
+        <mc:Choice xmlns:p14="http://schemas.microsoft.com/office/powerpoint/2010/main" xmlns:aink="http://schemas.microsoft.com/office/drawing/2016/ink" Requires="p14 aink">
+          <p:contentPart p14:bwMode="auto" r:id="rId5">
+            <p14:nvContentPartPr>
+              <p14:cNvPr id="3" name="Рукописні дані 2">
+                <a:extLst>
+                  <a:ext uri="{FF2B5EF4-FFF2-40B4-BE49-F238E27FC236}">
+                    <a16:creationId xmlns:a16="http://schemas.microsoft.com/office/drawing/2014/main" id="{F533DFF4-D1F1-41A4-B7B7-2597689AA608}"/>
+                  </a:ext>
+                </a:extLst>
+              </p14:cNvPr>
+              <p14:cNvContentPartPr/>
+              <p14:nvPr/>
+            </p14:nvContentPartPr>
+            <p14:xfrm>
+              <a:off x="65925" y="4428180"/>
+              <a:ext cx="5308560" cy="1470240"/>
+            </p14:xfrm>
+          </p:contentPart>
+        </mc:Choice>
+        <mc:Fallback>
+          <p:pic>
+            <p:nvPicPr>
+              <p:cNvPr id="3" name="Рукописні дані 2">
+                <a:extLst>
+                  <a:ext uri="{FF2B5EF4-FFF2-40B4-BE49-F238E27FC236}">
+                    <a16:creationId xmlns:a16="http://schemas.microsoft.com/office/drawing/2014/main" id="{F533DFF4-D1F1-41A4-B7B7-2597689AA608}"/>
+                  </a:ext>
+                </a:extLst>
+              </p:cNvPr>
+              <p:cNvPicPr/>
+              <p:nvPr/>
+            </p:nvPicPr>
+            <p:blipFill>
+              <a:blip r:embed="rId6"/>
+              <a:stretch>
+                <a:fillRect/>
+              </a:stretch>
+            </p:blipFill>
+            <p:spPr>
+              <a:xfrm>
+                <a:off x="56925" y="4419540"/>
+                <a:ext cx="5326200" cy="1487880"/>
+              </a:xfrm>
+              <a:prstGeom prst="rect">
+                <a:avLst/>
+              </a:prstGeom>
+            </p:spPr>
+          </p:pic>
+        </mc:Fallback>
+      </mc:AlternateContent>
     </p:spTree>
   </p:cSld>
   <p:clrMapOvr>
@@ -7682,6 +8666,231 @@
           </a:p>
         </p:txBody>
       </p:sp>
+      <mc:AlternateContent xmlns:mc="http://schemas.openxmlformats.org/markup-compatibility/2006">
+        <mc:Choice xmlns:p14="http://schemas.microsoft.com/office/powerpoint/2010/main" xmlns:aink="http://schemas.microsoft.com/office/drawing/2016/ink" Requires="p14 aink">
+          <p:contentPart p14:bwMode="auto" r:id="rId3">
+            <p14:nvContentPartPr>
+              <p14:cNvPr id="2" name="Рукописні дані 1">
+                <a:extLst>
+                  <a:ext uri="{FF2B5EF4-FFF2-40B4-BE49-F238E27FC236}">
+                    <a16:creationId xmlns:a16="http://schemas.microsoft.com/office/drawing/2014/main" id="{9AEDA7E2-FAC6-41E4-AE83-AE4C7AB23005}"/>
+                  </a:ext>
+                </a:extLst>
+              </p14:cNvPr>
+              <p14:cNvContentPartPr/>
+              <p14:nvPr/>
+            </p14:nvContentPartPr>
+            <p14:xfrm>
+              <a:off x="6705405" y="2884860"/>
+              <a:ext cx="5086440" cy="2011680"/>
+            </p14:xfrm>
+          </p:contentPart>
+        </mc:Choice>
+        <mc:Fallback>
+          <p:pic>
+            <p:nvPicPr>
+              <p:cNvPr id="2" name="Рукописні дані 1">
+                <a:extLst>
+                  <a:ext uri="{FF2B5EF4-FFF2-40B4-BE49-F238E27FC236}">
+                    <a16:creationId xmlns:a16="http://schemas.microsoft.com/office/drawing/2014/main" id="{9AEDA7E2-FAC6-41E4-AE83-AE4C7AB23005}"/>
+                  </a:ext>
+                </a:extLst>
+              </p:cNvPr>
+              <p:cNvPicPr/>
+              <p:nvPr/>
+            </p:nvPicPr>
+            <p:blipFill>
+              <a:blip r:embed="rId4"/>
+              <a:stretch>
+                <a:fillRect/>
+              </a:stretch>
+            </p:blipFill>
+            <p:spPr>
+              <a:xfrm>
+                <a:off x="6696765" y="2876220"/>
+                <a:ext cx="5104080" cy="2029320"/>
+              </a:xfrm>
+              <a:prstGeom prst="rect">
+                <a:avLst/>
+              </a:prstGeom>
+            </p:spPr>
+          </p:pic>
+        </mc:Fallback>
+      </mc:AlternateContent>
+      <p:grpSp>
+        <p:nvGrpSpPr>
+          <p:cNvPr id="5" name="Групувати 4">
+            <a:extLst>
+              <a:ext uri="{FF2B5EF4-FFF2-40B4-BE49-F238E27FC236}">
+                <a16:creationId xmlns:a16="http://schemas.microsoft.com/office/drawing/2014/main" id="{AEC104D4-9737-4989-BC78-051665EE36F0}"/>
+              </a:ext>
+            </a:extLst>
+          </p:cNvPr>
+          <p:cNvGrpSpPr/>
+          <p:nvPr/>
+        </p:nvGrpSpPr>
+        <p:grpSpPr>
+          <a:xfrm>
+            <a:off x="447885" y="2476260"/>
+            <a:ext cx="4516560" cy="2279520"/>
+            <a:chOff x="447885" y="2476260"/>
+            <a:chExt cx="4516560" cy="2279520"/>
+          </a:xfrm>
+        </p:grpSpPr>
+        <mc:AlternateContent xmlns:mc="http://schemas.openxmlformats.org/markup-compatibility/2006">
+          <mc:Choice xmlns:p14="http://schemas.microsoft.com/office/powerpoint/2010/main" xmlns:aink="http://schemas.microsoft.com/office/drawing/2016/ink" Requires="p14 aink">
+            <p:contentPart p14:bwMode="auto" r:id="rId5">
+              <p14:nvContentPartPr>
+                <p14:cNvPr id="3" name="Рукописні дані 2">
+                  <a:extLst>
+                    <a:ext uri="{FF2B5EF4-FFF2-40B4-BE49-F238E27FC236}">
+                      <a16:creationId xmlns:a16="http://schemas.microsoft.com/office/drawing/2014/main" id="{2137DF82-BB91-4D1D-8FA5-4BA70DEA8362}"/>
+                    </a:ext>
+                  </a:extLst>
+                </p14:cNvPr>
+                <p14:cNvContentPartPr/>
+                <p14:nvPr/>
+              </p14:nvContentPartPr>
+              <p14:xfrm>
+                <a:off x="447885" y="2715300"/>
+                <a:ext cx="4516560" cy="2040480"/>
+              </p14:xfrm>
+            </p:contentPart>
+          </mc:Choice>
+          <mc:Fallback>
+            <p:pic>
+              <p:nvPicPr>
+                <p:cNvPr id="3" name="Рукописні дані 2">
+                  <a:extLst>
+                    <a:ext uri="{FF2B5EF4-FFF2-40B4-BE49-F238E27FC236}">
+                      <a16:creationId xmlns:a16="http://schemas.microsoft.com/office/drawing/2014/main" id="{2137DF82-BB91-4D1D-8FA5-4BA70DEA8362}"/>
+                    </a:ext>
+                  </a:extLst>
+                </p:cNvPr>
+                <p:cNvPicPr/>
+                <p:nvPr/>
+              </p:nvPicPr>
+              <p:blipFill>
+                <a:blip r:embed="rId6"/>
+                <a:stretch>
+                  <a:fillRect/>
+                </a:stretch>
+              </p:blipFill>
+              <p:spPr>
+                <a:xfrm>
+                  <a:off x="438885" y="2706660"/>
+                  <a:ext cx="4534200" cy="2058120"/>
+                </a:xfrm>
+                <a:prstGeom prst="rect">
+                  <a:avLst/>
+                </a:prstGeom>
+              </p:spPr>
+            </p:pic>
+          </mc:Fallback>
+        </mc:AlternateContent>
+        <mc:AlternateContent xmlns:mc="http://schemas.openxmlformats.org/markup-compatibility/2006">
+          <mc:Choice xmlns:p14="http://schemas.microsoft.com/office/powerpoint/2010/main" xmlns:aink="http://schemas.microsoft.com/office/drawing/2016/ink" Requires="p14 aink">
+            <p:contentPart p14:bwMode="auto" r:id="rId7">
+              <p14:nvContentPartPr>
+                <p14:cNvPr id="4" name="Рукописні дані 3">
+                  <a:extLst>
+                    <a:ext uri="{FF2B5EF4-FFF2-40B4-BE49-F238E27FC236}">
+                      <a16:creationId xmlns:a16="http://schemas.microsoft.com/office/drawing/2014/main" id="{F769A16E-5A0D-4F80-A98E-7B9234A0CBB4}"/>
+                    </a:ext>
+                  </a:extLst>
+                </p14:cNvPr>
+                <p14:cNvContentPartPr/>
+                <p14:nvPr/>
+              </p14:nvContentPartPr>
+              <p14:xfrm>
+                <a:off x="3317445" y="2476260"/>
+                <a:ext cx="1073880" cy="17640"/>
+              </p14:xfrm>
+            </p:contentPart>
+          </mc:Choice>
+          <mc:Fallback>
+            <p:pic>
+              <p:nvPicPr>
+                <p:cNvPr id="4" name="Рукописні дані 3">
+                  <a:extLst>
+                    <a:ext uri="{FF2B5EF4-FFF2-40B4-BE49-F238E27FC236}">
+                      <a16:creationId xmlns:a16="http://schemas.microsoft.com/office/drawing/2014/main" id="{F769A16E-5A0D-4F80-A98E-7B9234A0CBB4}"/>
+                    </a:ext>
+                  </a:extLst>
+                </p:cNvPr>
+                <p:cNvPicPr/>
+                <p:nvPr/>
+              </p:nvPicPr>
+              <p:blipFill>
+                <a:blip r:embed="rId8"/>
+                <a:stretch>
+                  <a:fillRect/>
+                </a:stretch>
+              </p:blipFill>
+              <p:spPr>
+                <a:xfrm>
+                  <a:off x="3308805" y="2467620"/>
+                  <a:ext cx="1091520" cy="35280"/>
+                </a:xfrm>
+                <a:prstGeom prst="rect">
+                  <a:avLst/>
+                </a:prstGeom>
+              </p:spPr>
+            </p:pic>
+          </mc:Fallback>
+        </mc:AlternateContent>
+      </p:grpSp>
+      <mc:AlternateContent xmlns:mc="http://schemas.openxmlformats.org/markup-compatibility/2006">
+        <mc:Choice xmlns:p14="http://schemas.microsoft.com/office/powerpoint/2010/main" Requires="p14">
+          <p:contentPart p14:bwMode="auto" r:id="rId9">
+            <p14:nvContentPartPr>
+              <p14:cNvPr id="6" name="Рукописні дані 5">
+                <a:extLst>
+                  <a:ext uri="{FF2B5EF4-FFF2-40B4-BE49-F238E27FC236}">
+                    <a16:creationId xmlns:a16="http://schemas.microsoft.com/office/drawing/2014/main" id="{A8D9D563-DBF1-455B-8EC6-70E9A80D389E}"/>
+                  </a:ext>
+                </a:extLst>
+              </p14:cNvPr>
+              <p14:cNvContentPartPr/>
+              <p14:nvPr/>
+            </p14:nvContentPartPr>
+            <p14:xfrm>
+              <a:off x="7673445" y="4057740"/>
+              <a:ext cx="938520" cy="181800"/>
+            </p14:xfrm>
+          </p:contentPart>
+        </mc:Choice>
+        <mc:Fallback>
+          <p:pic>
+            <p:nvPicPr>
+              <p:cNvPr id="6" name="Рукописні дані 5">
+                <a:extLst>
+                  <a:ext uri="{FF2B5EF4-FFF2-40B4-BE49-F238E27FC236}">
+                    <a16:creationId xmlns:a16="http://schemas.microsoft.com/office/drawing/2014/main" id="{A8D9D563-DBF1-455B-8EC6-70E9A80D389E}"/>
+                  </a:ext>
+                </a:extLst>
+              </p:cNvPr>
+              <p:cNvPicPr/>
+              <p:nvPr/>
+            </p:nvPicPr>
+            <p:blipFill>
+              <a:blip r:embed="rId10"/>
+              <a:stretch>
+                <a:fillRect/>
+              </a:stretch>
+            </p:blipFill>
+            <p:spPr>
+              <a:xfrm>
+                <a:off x="7583805" y="3878100"/>
+                <a:ext cx="1118160" cy="541440"/>
+              </a:xfrm>
+              <a:prstGeom prst="rect">
+                <a:avLst/>
+              </a:prstGeom>
+            </p:spPr>
+          </p:pic>
+        </mc:Fallback>
+      </mc:AlternateContent>
     </p:spTree>
   </p:cSld>
   <p:clrMapOvr>
@@ -10929,6 +12138,388 @@
               <a:buSzPts val="1400"/>
             </a:pPr>
             <a:r>
+              <a:rPr lang="uk" sz="1867" dirty="0">
+                <a:solidFill>
+                  <a:srgbClr val="CC7832"/>
+                </a:solidFill>
+                <a:latin typeface="Courier New"/>
+                <a:ea typeface="Courier New"/>
+                <a:cs typeface="Courier New"/>
+                <a:sym typeface="Courier New"/>
+              </a:rPr>
+              <a:t>int</a:t>
+            </a:r>
+            <a:r>
+              <a:rPr lang="uk" sz="1867" dirty="0">
+                <a:solidFill>
+                  <a:srgbClr val="A9B7C6"/>
+                </a:solidFill>
+                <a:latin typeface="Courier New"/>
+                <a:ea typeface="Courier New"/>
+                <a:cs typeface="Courier New"/>
+                <a:sym typeface="Courier New"/>
+              </a:rPr>
+              <a:t>[] arr1 = {</a:t>
+            </a:r>
+            <a:r>
+              <a:rPr lang="uk" sz="1867" dirty="0">
+                <a:solidFill>
+                  <a:srgbClr val="6897BB"/>
+                </a:solidFill>
+                <a:latin typeface="Courier New"/>
+                <a:ea typeface="Courier New"/>
+                <a:cs typeface="Courier New"/>
+                <a:sym typeface="Courier New"/>
+              </a:rPr>
+              <a:t>1</a:t>
+            </a:r>
+            <a:r>
+              <a:rPr lang="uk" sz="1867" dirty="0">
+                <a:solidFill>
+                  <a:srgbClr val="CC7832"/>
+                </a:solidFill>
+                <a:latin typeface="Courier New"/>
+                <a:ea typeface="Courier New"/>
+                <a:cs typeface="Courier New"/>
+                <a:sym typeface="Courier New"/>
+              </a:rPr>
+              <a:t>, </a:t>
+            </a:r>
+            <a:r>
+              <a:rPr lang="uk" sz="1867" dirty="0">
+                <a:solidFill>
+                  <a:srgbClr val="6897BB"/>
+                </a:solidFill>
+                <a:latin typeface="Courier New"/>
+                <a:ea typeface="Courier New"/>
+                <a:cs typeface="Courier New"/>
+                <a:sym typeface="Courier New"/>
+              </a:rPr>
+              <a:t>2</a:t>
+            </a:r>
+            <a:r>
+              <a:rPr lang="uk" sz="1867" dirty="0">
+                <a:solidFill>
+                  <a:srgbClr val="CC7832"/>
+                </a:solidFill>
+                <a:latin typeface="Courier New"/>
+                <a:ea typeface="Courier New"/>
+                <a:cs typeface="Courier New"/>
+                <a:sym typeface="Courier New"/>
+              </a:rPr>
+              <a:t>, </a:t>
+            </a:r>
+            <a:r>
+              <a:rPr lang="uk" sz="1867" dirty="0">
+                <a:solidFill>
+                  <a:srgbClr val="6897BB"/>
+                </a:solidFill>
+                <a:latin typeface="Courier New"/>
+                <a:ea typeface="Courier New"/>
+                <a:cs typeface="Courier New"/>
+                <a:sym typeface="Courier New"/>
+              </a:rPr>
+              <a:t>3</a:t>
+            </a:r>
+            <a:r>
+              <a:rPr lang="uk" sz="1867" dirty="0">
+                <a:solidFill>
+                  <a:srgbClr val="CC7832"/>
+                </a:solidFill>
+                <a:latin typeface="Courier New"/>
+                <a:ea typeface="Courier New"/>
+                <a:cs typeface="Courier New"/>
+                <a:sym typeface="Courier New"/>
+              </a:rPr>
+              <a:t>, </a:t>
+            </a:r>
+            <a:r>
+              <a:rPr lang="uk" sz="1867" dirty="0">
+                <a:solidFill>
+                  <a:srgbClr val="6897BB"/>
+                </a:solidFill>
+                <a:latin typeface="Courier New"/>
+                <a:ea typeface="Courier New"/>
+                <a:cs typeface="Courier New"/>
+                <a:sym typeface="Courier New"/>
+              </a:rPr>
+              <a:t>4</a:t>
+            </a:r>
+            <a:r>
+              <a:rPr lang="uk" sz="1867" dirty="0">
+                <a:solidFill>
+                  <a:srgbClr val="CC7832"/>
+                </a:solidFill>
+                <a:latin typeface="Courier New"/>
+                <a:ea typeface="Courier New"/>
+                <a:cs typeface="Courier New"/>
+                <a:sym typeface="Courier New"/>
+              </a:rPr>
+              <a:t>, </a:t>
+            </a:r>
+            <a:r>
+              <a:rPr lang="uk" sz="1867" dirty="0">
+                <a:solidFill>
+                  <a:srgbClr val="6897BB"/>
+                </a:solidFill>
+                <a:latin typeface="Courier New"/>
+                <a:ea typeface="Courier New"/>
+                <a:cs typeface="Courier New"/>
+                <a:sym typeface="Courier New"/>
+              </a:rPr>
+              <a:t>5</a:t>
+            </a:r>
+            <a:r>
+              <a:rPr lang="uk" sz="1867" dirty="0">
+                <a:solidFill>
+                  <a:srgbClr val="CC7832"/>
+                </a:solidFill>
+                <a:latin typeface="Courier New"/>
+                <a:ea typeface="Courier New"/>
+                <a:cs typeface="Courier New"/>
+                <a:sym typeface="Courier New"/>
+              </a:rPr>
+              <a:t>, </a:t>
+            </a:r>
+            <a:r>
+              <a:rPr lang="uk" sz="1867" dirty="0">
+                <a:solidFill>
+                  <a:srgbClr val="6897BB"/>
+                </a:solidFill>
+                <a:latin typeface="Courier New"/>
+                <a:ea typeface="Courier New"/>
+                <a:cs typeface="Courier New"/>
+                <a:sym typeface="Courier New"/>
+              </a:rPr>
+              <a:t>6</a:t>
+            </a:r>
+            <a:r>
+              <a:rPr lang="uk" sz="1867" dirty="0">
+                <a:solidFill>
+                  <a:srgbClr val="A9B7C6"/>
+                </a:solidFill>
+                <a:latin typeface="Courier New"/>
+                <a:ea typeface="Courier New"/>
+                <a:cs typeface="Courier New"/>
+                <a:sym typeface="Courier New"/>
+              </a:rPr>
+              <a:t>}</a:t>
+            </a:r>
+            <a:r>
+              <a:rPr lang="uk" sz="1867" dirty="0">
+                <a:solidFill>
+                  <a:srgbClr val="CC7832"/>
+                </a:solidFill>
+                <a:latin typeface="Courier New"/>
+                <a:ea typeface="Courier New"/>
+                <a:cs typeface="Courier New"/>
+                <a:sym typeface="Courier New"/>
+              </a:rPr>
+              <a:t>;</a:t>
+            </a:r>
+            <a:br>
+              <a:rPr lang="uk" sz="1867" dirty="0">
+                <a:solidFill>
+                  <a:srgbClr val="CC7832"/>
+                </a:solidFill>
+                <a:latin typeface="Courier New"/>
+                <a:ea typeface="Courier New"/>
+                <a:cs typeface="Courier New"/>
+                <a:sym typeface="Courier New"/>
+              </a:rPr>
+            </a:br>
+            <a:r>
+              <a:rPr lang="uk" sz="1867" dirty="0">
+                <a:solidFill>
+                  <a:srgbClr val="CC7832"/>
+                </a:solidFill>
+                <a:latin typeface="Courier New"/>
+                <a:ea typeface="Courier New"/>
+                <a:cs typeface="Courier New"/>
+                <a:sym typeface="Courier New"/>
+              </a:rPr>
+              <a:t>int</a:t>
+            </a:r>
+            <a:r>
+              <a:rPr lang="uk" sz="1867" dirty="0">
+                <a:solidFill>
+                  <a:srgbClr val="A9B7C6"/>
+                </a:solidFill>
+                <a:latin typeface="Courier New"/>
+                <a:ea typeface="Courier New"/>
+                <a:cs typeface="Courier New"/>
+                <a:sym typeface="Courier New"/>
+              </a:rPr>
+              <a:t>[] arr2 = {</a:t>
+            </a:r>
+            <a:r>
+              <a:rPr lang="uk" sz="1867" dirty="0">
+                <a:solidFill>
+                  <a:srgbClr val="6897BB"/>
+                </a:solidFill>
+                <a:latin typeface="Courier New"/>
+                <a:ea typeface="Courier New"/>
+                <a:cs typeface="Courier New"/>
+                <a:sym typeface="Courier New"/>
+              </a:rPr>
+              <a:t>1</a:t>
+            </a:r>
+            <a:r>
+              <a:rPr lang="uk" sz="1867" dirty="0">
+                <a:solidFill>
+                  <a:srgbClr val="CC7832"/>
+                </a:solidFill>
+                <a:latin typeface="Courier New"/>
+                <a:ea typeface="Courier New"/>
+                <a:cs typeface="Courier New"/>
+                <a:sym typeface="Courier New"/>
+              </a:rPr>
+              <a:t>, </a:t>
+            </a:r>
+            <a:r>
+              <a:rPr lang="uk" sz="1867" dirty="0">
+                <a:solidFill>
+                  <a:srgbClr val="6897BB"/>
+                </a:solidFill>
+                <a:latin typeface="Courier New"/>
+                <a:ea typeface="Courier New"/>
+                <a:cs typeface="Courier New"/>
+                <a:sym typeface="Courier New"/>
+              </a:rPr>
+              <a:t>2</a:t>
+            </a:r>
+            <a:r>
+              <a:rPr lang="uk" sz="1867" dirty="0">
+                <a:solidFill>
+                  <a:srgbClr val="CC7832"/>
+                </a:solidFill>
+                <a:latin typeface="Courier New"/>
+                <a:ea typeface="Courier New"/>
+                <a:cs typeface="Courier New"/>
+                <a:sym typeface="Courier New"/>
+              </a:rPr>
+              <a:t>, </a:t>
+            </a:r>
+            <a:r>
+              <a:rPr lang="uk" sz="1867" dirty="0">
+                <a:solidFill>
+                  <a:srgbClr val="6897BB"/>
+                </a:solidFill>
+                <a:latin typeface="Courier New"/>
+                <a:ea typeface="Courier New"/>
+                <a:cs typeface="Courier New"/>
+                <a:sym typeface="Courier New"/>
+              </a:rPr>
+              <a:t>3</a:t>
+            </a:r>
+            <a:r>
+              <a:rPr lang="uk" sz="1867" dirty="0">
+                <a:solidFill>
+                  <a:srgbClr val="CC7832"/>
+                </a:solidFill>
+                <a:latin typeface="Courier New"/>
+                <a:ea typeface="Courier New"/>
+                <a:cs typeface="Courier New"/>
+                <a:sym typeface="Courier New"/>
+              </a:rPr>
+              <a:t>, </a:t>
+            </a:r>
+            <a:r>
+              <a:rPr lang="uk" sz="1867" dirty="0">
+                <a:solidFill>
+                  <a:srgbClr val="6897BB"/>
+                </a:solidFill>
+                <a:latin typeface="Courier New"/>
+                <a:ea typeface="Courier New"/>
+                <a:cs typeface="Courier New"/>
+                <a:sym typeface="Courier New"/>
+              </a:rPr>
+              <a:t>4</a:t>
+            </a:r>
+            <a:r>
+              <a:rPr lang="uk" sz="1867" dirty="0">
+                <a:solidFill>
+                  <a:srgbClr val="CC7832"/>
+                </a:solidFill>
+                <a:latin typeface="Courier New"/>
+                <a:ea typeface="Courier New"/>
+                <a:cs typeface="Courier New"/>
+                <a:sym typeface="Courier New"/>
+              </a:rPr>
+              <a:t>, </a:t>
+            </a:r>
+            <a:r>
+              <a:rPr lang="uk" sz="1867" dirty="0">
+                <a:solidFill>
+                  <a:srgbClr val="6897BB"/>
+                </a:solidFill>
+                <a:latin typeface="Courier New"/>
+                <a:ea typeface="Courier New"/>
+                <a:cs typeface="Courier New"/>
+                <a:sym typeface="Courier New"/>
+              </a:rPr>
+              <a:t>5</a:t>
+            </a:r>
+            <a:r>
+              <a:rPr lang="uk" sz="1867" dirty="0">
+                <a:solidFill>
+                  <a:srgbClr val="CC7832"/>
+                </a:solidFill>
+                <a:latin typeface="Courier New"/>
+                <a:ea typeface="Courier New"/>
+                <a:cs typeface="Courier New"/>
+                <a:sym typeface="Courier New"/>
+              </a:rPr>
+              <a:t>, </a:t>
+            </a:r>
+            <a:r>
+              <a:rPr lang="uk" sz="1867" dirty="0">
+                <a:solidFill>
+                  <a:srgbClr val="6897BB"/>
+                </a:solidFill>
+                <a:latin typeface="Courier New"/>
+                <a:ea typeface="Courier New"/>
+                <a:cs typeface="Courier New"/>
+                <a:sym typeface="Courier New"/>
+              </a:rPr>
+              <a:t>6</a:t>
+            </a:r>
+            <a:r>
+              <a:rPr lang="uk" sz="1867" dirty="0">
+                <a:solidFill>
+                  <a:srgbClr val="A9B7C6"/>
+                </a:solidFill>
+                <a:latin typeface="Courier New"/>
+                <a:ea typeface="Courier New"/>
+                <a:cs typeface="Courier New"/>
+                <a:sym typeface="Courier New"/>
+              </a:rPr>
+              <a:t>}</a:t>
+            </a:r>
+            <a:r>
+              <a:rPr lang="uk" sz="1867" dirty="0">
+                <a:solidFill>
+                  <a:srgbClr val="CC7832"/>
+                </a:solidFill>
+                <a:latin typeface="Courier New"/>
+                <a:ea typeface="Courier New"/>
+                <a:cs typeface="Courier New"/>
+                <a:sym typeface="Courier New"/>
+              </a:rPr>
+              <a:t>;</a:t>
+            </a:r>
+            <a:br>
+              <a:rPr lang="uk" sz="1867" dirty="0">
+                <a:solidFill>
+                  <a:srgbClr val="CC7832"/>
+                </a:solidFill>
+                <a:latin typeface="Courier New"/>
+                <a:ea typeface="Courier New"/>
+                <a:cs typeface="Courier New"/>
+                <a:sym typeface="Courier New"/>
+              </a:rPr>
+            </a:br>
+            <a:r>
               <a:rPr lang="uk" sz="1867">
                 <a:solidFill>
                   <a:srgbClr val="CC7832"/>
@@ -10938,7 +12529,7 @@
                 <a:cs typeface="Courier New"/>
                 <a:sym typeface="Courier New"/>
               </a:rPr>
-              <a:t>int</a:t>
+              <a:t>if </a:t>
             </a:r>
             <a:r>
               <a:rPr lang="uk" sz="1867">
@@ -10950,22 +12541,81 @@
                 <a:cs typeface="Courier New"/>
                 <a:sym typeface="Courier New"/>
               </a:rPr>
-              <a:t>[] arr1 = {</a:t>
-            </a:r>
-            <a:r>
-              <a:rPr lang="uk" sz="1867">
-                <a:solidFill>
-                  <a:srgbClr val="6897BB"/>
-                </a:solidFill>
-                <a:latin typeface="Courier New"/>
-                <a:ea typeface="Courier New"/>
-                <a:cs typeface="Courier New"/>
-                <a:sym typeface="Courier New"/>
-              </a:rPr>
-              <a:t>1</a:t>
-            </a:r>
-            <a:r>
-              <a:rPr lang="uk" sz="1867">
+              <a:t>()</a:t>
+            </a:r>
+            <a:br>
+              <a:rPr lang="uk" sz="1867" dirty="0">
+                <a:solidFill>
+                  <a:srgbClr val="A9B7C6"/>
+                </a:solidFill>
+                <a:latin typeface="Courier New"/>
+                <a:ea typeface="Courier New"/>
+                <a:cs typeface="Courier New"/>
+                <a:sym typeface="Courier New"/>
+              </a:rPr>
+            </a:br>
+            <a:r>
+              <a:rPr lang="uk" sz="1867" dirty="0">
+                <a:solidFill>
+                  <a:srgbClr val="A9B7C6"/>
+                </a:solidFill>
+                <a:latin typeface="Courier New"/>
+                <a:ea typeface="Courier New"/>
+                <a:cs typeface="Courier New"/>
+                <a:sym typeface="Courier New"/>
+              </a:rPr>
+              <a:t>    System.</a:t>
+            </a:r>
+            <a:r>
+              <a:rPr lang="uk" sz="1867" i="1" dirty="0">
+                <a:solidFill>
+                  <a:srgbClr val="9876AA"/>
+                </a:solidFill>
+                <a:latin typeface="Courier New"/>
+                <a:ea typeface="Courier New"/>
+                <a:cs typeface="Courier New"/>
+                <a:sym typeface="Courier New"/>
+              </a:rPr>
+              <a:t>out</a:t>
+            </a:r>
+            <a:r>
+              <a:rPr lang="uk" sz="1867" dirty="0">
+                <a:solidFill>
+                  <a:srgbClr val="A9B7C6"/>
+                </a:solidFill>
+                <a:latin typeface="Courier New"/>
+                <a:ea typeface="Courier New"/>
+                <a:cs typeface="Courier New"/>
+                <a:sym typeface="Courier New"/>
+              </a:rPr>
+              <a:t>.println(</a:t>
+            </a:r>
+            <a:r>
+              <a:rPr lang="uk" sz="1867" dirty="0">
+                <a:solidFill>
+                  <a:srgbClr val="6A8759"/>
+                </a:solidFill>
+                <a:latin typeface="Courier New"/>
+                <a:ea typeface="Courier New"/>
+                <a:cs typeface="Courier New"/>
+                <a:sym typeface="Courier New"/>
+              </a:rPr>
+              <a:t>"Масиви рівні!"</a:t>
+            </a:r>
+            <a:r>
+              <a:rPr lang="uk" sz="1867" dirty="0">
+                <a:solidFill>
+                  <a:srgbClr val="A9B7C6"/>
+                </a:solidFill>
+                <a:latin typeface="Courier New"/>
+                <a:ea typeface="Courier New"/>
+                <a:cs typeface="Courier New"/>
+                <a:sym typeface="Courier New"/>
+              </a:rPr>
+              <a:t>)</a:t>
+            </a:r>
+            <a:r>
+              <a:rPr lang="uk" sz="1867" dirty="0">
                 <a:solidFill>
                   <a:srgbClr val="CC7832"/>
                 </a:solidFill>
@@ -10974,498 +12624,9 @@
                 <a:cs typeface="Courier New"/>
                 <a:sym typeface="Courier New"/>
               </a:rPr>
-              <a:t>, </a:t>
-            </a:r>
-            <a:r>
-              <a:rPr lang="uk" sz="1867">
-                <a:solidFill>
-                  <a:srgbClr val="6897BB"/>
-                </a:solidFill>
-                <a:latin typeface="Courier New"/>
-                <a:ea typeface="Courier New"/>
-                <a:cs typeface="Courier New"/>
-                <a:sym typeface="Courier New"/>
-              </a:rPr>
-              <a:t>2</a:t>
-            </a:r>
-            <a:r>
-              <a:rPr lang="uk" sz="1867">
-                <a:solidFill>
-                  <a:srgbClr val="CC7832"/>
-                </a:solidFill>
-                <a:latin typeface="Courier New"/>
-                <a:ea typeface="Courier New"/>
-                <a:cs typeface="Courier New"/>
-                <a:sym typeface="Courier New"/>
-              </a:rPr>
-              <a:t>, </a:t>
-            </a:r>
-            <a:r>
-              <a:rPr lang="uk" sz="1867">
-                <a:solidFill>
-                  <a:srgbClr val="6897BB"/>
-                </a:solidFill>
-                <a:latin typeface="Courier New"/>
-                <a:ea typeface="Courier New"/>
-                <a:cs typeface="Courier New"/>
-                <a:sym typeface="Courier New"/>
-              </a:rPr>
-              <a:t>3</a:t>
-            </a:r>
-            <a:r>
-              <a:rPr lang="uk" sz="1867">
-                <a:solidFill>
-                  <a:srgbClr val="CC7832"/>
-                </a:solidFill>
-                <a:latin typeface="Courier New"/>
-                <a:ea typeface="Courier New"/>
-                <a:cs typeface="Courier New"/>
-                <a:sym typeface="Courier New"/>
-              </a:rPr>
-              <a:t>, </a:t>
-            </a:r>
-            <a:r>
-              <a:rPr lang="uk" sz="1867">
-                <a:solidFill>
-                  <a:srgbClr val="6897BB"/>
-                </a:solidFill>
-                <a:latin typeface="Courier New"/>
-                <a:ea typeface="Courier New"/>
-                <a:cs typeface="Courier New"/>
-                <a:sym typeface="Courier New"/>
-              </a:rPr>
-              <a:t>4</a:t>
-            </a:r>
-            <a:r>
-              <a:rPr lang="uk" sz="1867">
-                <a:solidFill>
-                  <a:srgbClr val="CC7832"/>
-                </a:solidFill>
-                <a:latin typeface="Courier New"/>
-                <a:ea typeface="Courier New"/>
-                <a:cs typeface="Courier New"/>
-                <a:sym typeface="Courier New"/>
-              </a:rPr>
-              <a:t>, </a:t>
-            </a:r>
-            <a:r>
-              <a:rPr lang="uk" sz="1867">
-                <a:solidFill>
-                  <a:srgbClr val="6897BB"/>
-                </a:solidFill>
-                <a:latin typeface="Courier New"/>
-                <a:ea typeface="Courier New"/>
-                <a:cs typeface="Courier New"/>
-                <a:sym typeface="Courier New"/>
-              </a:rPr>
-              <a:t>5</a:t>
-            </a:r>
-            <a:r>
-              <a:rPr lang="uk" sz="1867">
-                <a:solidFill>
-                  <a:srgbClr val="CC7832"/>
-                </a:solidFill>
-                <a:latin typeface="Courier New"/>
-                <a:ea typeface="Courier New"/>
-                <a:cs typeface="Courier New"/>
-                <a:sym typeface="Courier New"/>
-              </a:rPr>
-              <a:t>, </a:t>
-            </a:r>
-            <a:r>
-              <a:rPr lang="uk" sz="1867">
-                <a:solidFill>
-                  <a:srgbClr val="6897BB"/>
-                </a:solidFill>
-                <a:latin typeface="Courier New"/>
-                <a:ea typeface="Courier New"/>
-                <a:cs typeface="Courier New"/>
-                <a:sym typeface="Courier New"/>
-              </a:rPr>
-              <a:t>6</a:t>
-            </a:r>
-            <a:r>
-              <a:rPr lang="uk" sz="1867">
-                <a:solidFill>
-                  <a:srgbClr val="A9B7C6"/>
-                </a:solidFill>
-                <a:latin typeface="Courier New"/>
-                <a:ea typeface="Courier New"/>
-                <a:cs typeface="Courier New"/>
-                <a:sym typeface="Courier New"/>
-              </a:rPr>
-              <a:t>}</a:t>
-            </a:r>
-            <a:r>
-              <a:rPr lang="uk" sz="1867">
-                <a:solidFill>
-                  <a:srgbClr val="CC7832"/>
-                </a:solidFill>
-                <a:latin typeface="Courier New"/>
-                <a:ea typeface="Courier New"/>
-                <a:cs typeface="Courier New"/>
-                <a:sym typeface="Courier New"/>
-              </a:rPr>
               <a:t>;</a:t>
             </a:r>
-            <a:br>
-              <a:rPr lang="uk" sz="1867">
-                <a:solidFill>
-                  <a:srgbClr val="CC7832"/>
-                </a:solidFill>
-                <a:latin typeface="Courier New"/>
-                <a:ea typeface="Courier New"/>
-                <a:cs typeface="Courier New"/>
-                <a:sym typeface="Courier New"/>
-              </a:rPr>
-            </a:br>
-            <a:r>
-              <a:rPr lang="uk" sz="1867">
-                <a:solidFill>
-                  <a:srgbClr val="CC7832"/>
-                </a:solidFill>
-                <a:latin typeface="Courier New"/>
-                <a:ea typeface="Courier New"/>
-                <a:cs typeface="Courier New"/>
-                <a:sym typeface="Courier New"/>
-              </a:rPr>
-              <a:t>int</a:t>
-            </a:r>
-            <a:r>
-              <a:rPr lang="uk" sz="1867">
-                <a:solidFill>
-                  <a:srgbClr val="A9B7C6"/>
-                </a:solidFill>
-                <a:latin typeface="Courier New"/>
-                <a:ea typeface="Courier New"/>
-                <a:cs typeface="Courier New"/>
-                <a:sym typeface="Courier New"/>
-              </a:rPr>
-              <a:t>[] arr2 = {</a:t>
-            </a:r>
-            <a:r>
-              <a:rPr lang="uk" sz="1867">
-                <a:solidFill>
-                  <a:srgbClr val="6897BB"/>
-                </a:solidFill>
-                <a:latin typeface="Courier New"/>
-                <a:ea typeface="Courier New"/>
-                <a:cs typeface="Courier New"/>
-                <a:sym typeface="Courier New"/>
-              </a:rPr>
-              <a:t>1</a:t>
-            </a:r>
-            <a:r>
-              <a:rPr lang="uk" sz="1867">
-                <a:solidFill>
-                  <a:srgbClr val="CC7832"/>
-                </a:solidFill>
-                <a:latin typeface="Courier New"/>
-                <a:ea typeface="Courier New"/>
-                <a:cs typeface="Courier New"/>
-                <a:sym typeface="Courier New"/>
-              </a:rPr>
-              <a:t>, </a:t>
-            </a:r>
-            <a:r>
-              <a:rPr lang="uk" sz="1867">
-                <a:solidFill>
-                  <a:srgbClr val="6897BB"/>
-                </a:solidFill>
-                <a:latin typeface="Courier New"/>
-                <a:ea typeface="Courier New"/>
-                <a:cs typeface="Courier New"/>
-                <a:sym typeface="Courier New"/>
-              </a:rPr>
-              <a:t>2</a:t>
-            </a:r>
-            <a:r>
-              <a:rPr lang="uk" sz="1867">
-                <a:solidFill>
-                  <a:srgbClr val="CC7832"/>
-                </a:solidFill>
-                <a:latin typeface="Courier New"/>
-                <a:ea typeface="Courier New"/>
-                <a:cs typeface="Courier New"/>
-                <a:sym typeface="Courier New"/>
-              </a:rPr>
-              <a:t>, </a:t>
-            </a:r>
-            <a:r>
-              <a:rPr lang="uk" sz="1867">
-                <a:solidFill>
-                  <a:srgbClr val="6897BB"/>
-                </a:solidFill>
-                <a:latin typeface="Courier New"/>
-                <a:ea typeface="Courier New"/>
-                <a:cs typeface="Courier New"/>
-                <a:sym typeface="Courier New"/>
-              </a:rPr>
-              <a:t>3</a:t>
-            </a:r>
-            <a:r>
-              <a:rPr lang="uk" sz="1867">
-                <a:solidFill>
-                  <a:srgbClr val="CC7832"/>
-                </a:solidFill>
-                <a:latin typeface="Courier New"/>
-                <a:ea typeface="Courier New"/>
-                <a:cs typeface="Courier New"/>
-                <a:sym typeface="Courier New"/>
-              </a:rPr>
-              <a:t>, </a:t>
-            </a:r>
-            <a:r>
-              <a:rPr lang="uk" sz="1867">
-                <a:solidFill>
-                  <a:srgbClr val="6897BB"/>
-                </a:solidFill>
-                <a:latin typeface="Courier New"/>
-                <a:ea typeface="Courier New"/>
-                <a:cs typeface="Courier New"/>
-                <a:sym typeface="Courier New"/>
-              </a:rPr>
-              <a:t>4</a:t>
-            </a:r>
-            <a:r>
-              <a:rPr lang="uk" sz="1867">
-                <a:solidFill>
-                  <a:srgbClr val="CC7832"/>
-                </a:solidFill>
-                <a:latin typeface="Courier New"/>
-                <a:ea typeface="Courier New"/>
-                <a:cs typeface="Courier New"/>
-                <a:sym typeface="Courier New"/>
-              </a:rPr>
-              <a:t>, </a:t>
-            </a:r>
-            <a:r>
-              <a:rPr lang="uk" sz="1867">
-                <a:solidFill>
-                  <a:srgbClr val="6897BB"/>
-                </a:solidFill>
-                <a:latin typeface="Courier New"/>
-                <a:ea typeface="Courier New"/>
-                <a:cs typeface="Courier New"/>
-                <a:sym typeface="Courier New"/>
-              </a:rPr>
-              <a:t>5</a:t>
-            </a:r>
-            <a:r>
-              <a:rPr lang="uk" sz="1867">
-                <a:solidFill>
-                  <a:srgbClr val="CC7832"/>
-                </a:solidFill>
-                <a:latin typeface="Courier New"/>
-                <a:ea typeface="Courier New"/>
-                <a:cs typeface="Courier New"/>
-                <a:sym typeface="Courier New"/>
-              </a:rPr>
-              <a:t>, </a:t>
-            </a:r>
-            <a:r>
-              <a:rPr lang="uk" sz="1867">
-                <a:solidFill>
-                  <a:srgbClr val="6897BB"/>
-                </a:solidFill>
-                <a:latin typeface="Courier New"/>
-                <a:ea typeface="Courier New"/>
-                <a:cs typeface="Courier New"/>
-                <a:sym typeface="Courier New"/>
-              </a:rPr>
-              <a:t>6</a:t>
-            </a:r>
-            <a:r>
-              <a:rPr lang="uk" sz="1867">
-                <a:solidFill>
-                  <a:srgbClr val="A9B7C6"/>
-                </a:solidFill>
-                <a:latin typeface="Courier New"/>
-                <a:ea typeface="Courier New"/>
-                <a:cs typeface="Courier New"/>
-                <a:sym typeface="Courier New"/>
-              </a:rPr>
-              <a:t>}</a:t>
-            </a:r>
-            <a:r>
-              <a:rPr lang="uk" sz="1867">
-                <a:solidFill>
-                  <a:srgbClr val="CC7832"/>
-                </a:solidFill>
-                <a:latin typeface="Courier New"/>
-                <a:ea typeface="Courier New"/>
-                <a:cs typeface="Courier New"/>
-                <a:sym typeface="Courier New"/>
-              </a:rPr>
-              <a:t>;</a:t>
-            </a:r>
-            <a:br>
-              <a:rPr lang="uk" sz="1867">
-                <a:solidFill>
-                  <a:srgbClr val="CC7832"/>
-                </a:solidFill>
-                <a:latin typeface="Courier New"/>
-                <a:ea typeface="Courier New"/>
-                <a:cs typeface="Courier New"/>
-                <a:sym typeface="Courier New"/>
-              </a:rPr>
-            </a:br>
-            <a:r>
-              <a:rPr lang="uk" sz="1867">
-                <a:solidFill>
-                  <a:srgbClr val="CC7832"/>
-                </a:solidFill>
-                <a:latin typeface="Courier New"/>
-                <a:ea typeface="Courier New"/>
-                <a:cs typeface="Courier New"/>
-                <a:sym typeface="Courier New"/>
-              </a:rPr>
-              <a:t>if </a:t>
-            </a:r>
-            <a:r>
-              <a:rPr lang="uk" sz="1867">
-                <a:solidFill>
-                  <a:srgbClr val="A9B7C6"/>
-                </a:solidFill>
-                <a:latin typeface="Courier New"/>
-                <a:ea typeface="Courier New"/>
-                <a:cs typeface="Courier New"/>
-                <a:sym typeface="Courier New"/>
-              </a:rPr>
-              <a:t>(Arrays.</a:t>
-            </a:r>
-            <a:r>
-              <a:rPr lang="uk" sz="1867" i="1">
-                <a:solidFill>
-                  <a:srgbClr val="A9B7C6"/>
-                </a:solidFill>
-                <a:latin typeface="Courier New"/>
-                <a:ea typeface="Courier New"/>
-                <a:cs typeface="Courier New"/>
-                <a:sym typeface="Courier New"/>
-              </a:rPr>
-              <a:t>equals</a:t>
-            </a:r>
-            <a:r>
-              <a:rPr lang="uk" sz="1867">
-                <a:solidFill>
-                  <a:srgbClr val="A9B7C6"/>
-                </a:solidFill>
-                <a:latin typeface="Courier New"/>
-                <a:ea typeface="Courier New"/>
-                <a:cs typeface="Courier New"/>
-                <a:sym typeface="Courier New"/>
-              </a:rPr>
-              <a:t>(arr1</a:t>
-            </a:r>
-            <a:r>
-              <a:rPr lang="uk" sz="1867">
-                <a:solidFill>
-                  <a:srgbClr val="CC7832"/>
-                </a:solidFill>
-                <a:latin typeface="Courier New"/>
-                <a:ea typeface="Courier New"/>
-                <a:cs typeface="Courier New"/>
-                <a:sym typeface="Courier New"/>
-              </a:rPr>
-              <a:t>, </a:t>
-            </a:r>
-            <a:r>
-              <a:rPr lang="uk" sz="1867">
-                <a:solidFill>
-                  <a:srgbClr val="A9B7C6"/>
-                </a:solidFill>
-                <a:latin typeface="Courier New"/>
-                <a:ea typeface="Courier New"/>
-                <a:cs typeface="Courier New"/>
-                <a:sym typeface="Courier New"/>
-              </a:rPr>
-              <a:t>arr2))</a:t>
-            </a:r>
-            <a:br>
-              <a:rPr lang="uk" sz="1867">
-                <a:solidFill>
-                  <a:srgbClr val="A9B7C6"/>
-                </a:solidFill>
-                <a:latin typeface="Courier New"/>
-                <a:ea typeface="Courier New"/>
-                <a:cs typeface="Courier New"/>
-                <a:sym typeface="Courier New"/>
-              </a:rPr>
-            </a:br>
-            <a:r>
-              <a:rPr lang="uk" sz="1867">
-                <a:solidFill>
-                  <a:srgbClr val="A9B7C6"/>
-                </a:solidFill>
-                <a:latin typeface="Courier New"/>
-                <a:ea typeface="Courier New"/>
-                <a:cs typeface="Courier New"/>
-                <a:sym typeface="Courier New"/>
-              </a:rPr>
-              <a:t>    System.</a:t>
-            </a:r>
-            <a:r>
-              <a:rPr lang="uk" sz="1867" i="1">
-                <a:solidFill>
-                  <a:srgbClr val="9876AA"/>
-                </a:solidFill>
-                <a:latin typeface="Courier New"/>
-                <a:ea typeface="Courier New"/>
-                <a:cs typeface="Courier New"/>
-                <a:sym typeface="Courier New"/>
-              </a:rPr>
-              <a:t>out</a:t>
-            </a:r>
-            <a:r>
-              <a:rPr lang="uk" sz="1867">
-                <a:solidFill>
-                  <a:srgbClr val="A9B7C6"/>
-                </a:solidFill>
-                <a:latin typeface="Courier New"/>
-                <a:ea typeface="Courier New"/>
-                <a:cs typeface="Courier New"/>
-                <a:sym typeface="Courier New"/>
-              </a:rPr>
-              <a:t>.println(</a:t>
-            </a:r>
-            <a:r>
-              <a:rPr lang="uk" sz="1867">
-                <a:solidFill>
-                  <a:srgbClr val="6A8759"/>
-                </a:solidFill>
-                <a:latin typeface="Courier New"/>
-                <a:ea typeface="Courier New"/>
-                <a:cs typeface="Courier New"/>
-                <a:sym typeface="Courier New"/>
-              </a:rPr>
-              <a:t>"Масиви рівні!"</a:t>
-            </a:r>
-            <a:r>
-              <a:rPr lang="uk" sz="1867">
-                <a:solidFill>
-                  <a:srgbClr val="A9B7C6"/>
-                </a:solidFill>
-                <a:latin typeface="Courier New"/>
-                <a:ea typeface="Courier New"/>
-                <a:cs typeface="Courier New"/>
-                <a:sym typeface="Courier New"/>
-              </a:rPr>
-              <a:t>)</a:t>
-            </a:r>
-            <a:r>
-              <a:rPr lang="uk" sz="1867">
-                <a:solidFill>
-                  <a:srgbClr val="CC7832"/>
-                </a:solidFill>
-                <a:latin typeface="Courier New"/>
-                <a:ea typeface="Courier New"/>
-                <a:cs typeface="Courier New"/>
-                <a:sym typeface="Courier New"/>
-              </a:rPr>
-              <a:t>;</a:t>
-            </a:r>
-            <a:endParaRPr sz="4000">
+            <a:endParaRPr sz="4000" dirty="0">
               <a:solidFill>
                 <a:schemeClr val="dk1"/>
               </a:solidFill>
@@ -11518,6 +12679,312 @@
           </a:p>
         </p:txBody>
       </p:sp>
+      <mc:AlternateContent xmlns:mc="http://schemas.openxmlformats.org/markup-compatibility/2006" xmlns:p14="http://schemas.microsoft.com/office/powerpoint/2010/main" xmlns:aink="http://schemas.microsoft.com/office/drawing/2016/ink">
+        <mc:Choice Requires="p14 aink">
+          <p:contentPart p14:bwMode="auto" r:id="rId3">
+            <p14:nvContentPartPr>
+              <p14:cNvPr id="2" name="Рукописні дані 1">
+                <a:extLst>
+                  <a:ext uri="{FF2B5EF4-FFF2-40B4-BE49-F238E27FC236}">
+                    <a16:creationId xmlns:a16="http://schemas.microsoft.com/office/drawing/2014/main" id="{386DEB18-66ED-48F9-81A3-008B878DE134}"/>
+                  </a:ext>
+                </a:extLst>
+              </p14:cNvPr>
+              <p14:cNvContentPartPr/>
+              <p14:nvPr/>
+            </p14:nvContentPartPr>
+            <p14:xfrm>
+              <a:off x="9134685" y="818850"/>
+              <a:ext cx="4320" cy="360"/>
+            </p14:xfrm>
+          </p:contentPart>
+        </mc:Choice>
+        <mc:Fallback xmlns="">
+          <p:pic>
+            <p:nvPicPr>
+              <p:cNvPr id="2" name="Рукописні дані 1">
+                <a:extLst>
+                  <a:ext uri="{FF2B5EF4-FFF2-40B4-BE49-F238E27FC236}">
+                    <a16:creationId xmlns:a16="http://schemas.microsoft.com/office/drawing/2014/main" id="{386DEB18-66ED-48F9-81A3-008B878DE134}"/>
+                  </a:ext>
+                </a:extLst>
+              </p:cNvPr>
+              <p:cNvPicPr/>
+              <p:nvPr/>
+            </p:nvPicPr>
+            <p:blipFill>
+              <a:blip r:embed="rId4"/>
+              <a:stretch>
+                <a:fillRect/>
+              </a:stretch>
+            </p:blipFill>
+            <p:spPr>
+              <a:xfrm>
+                <a:off x="9125685" y="810210"/>
+                <a:ext cx="21960" cy="18000"/>
+              </a:xfrm>
+              <a:prstGeom prst="rect">
+                <a:avLst/>
+              </a:prstGeom>
+            </p:spPr>
+          </p:pic>
+        </mc:Fallback>
+      </mc:AlternateContent>
+      <mc:AlternateContent xmlns:mc="http://schemas.openxmlformats.org/markup-compatibility/2006">
+        <mc:Choice xmlns:p14="http://schemas.microsoft.com/office/powerpoint/2010/main" xmlns:aink="http://schemas.microsoft.com/office/drawing/2016/ink" Requires="p14 aink">
+          <p:contentPart p14:bwMode="auto" r:id="rId5">
+            <p14:nvContentPartPr>
+              <p14:cNvPr id="3" name="Рукописні дані 2">
+                <a:extLst>
+                  <a:ext uri="{FF2B5EF4-FFF2-40B4-BE49-F238E27FC236}">
+                    <a16:creationId xmlns:a16="http://schemas.microsoft.com/office/drawing/2014/main" id="{71D6A823-DBDD-47B8-AD22-9C19C9D82425}"/>
+                  </a:ext>
+                </a:extLst>
+              </p14:cNvPr>
+              <p14:cNvContentPartPr/>
+              <p14:nvPr/>
+            </p14:nvContentPartPr>
+            <p14:xfrm>
+              <a:off x="304605" y="1427970"/>
+              <a:ext cx="3297600" cy="57960"/>
+            </p14:xfrm>
+          </p:contentPart>
+        </mc:Choice>
+        <mc:Fallback>
+          <p:pic>
+            <p:nvPicPr>
+              <p:cNvPr id="3" name="Рукописні дані 2">
+                <a:extLst>
+                  <a:ext uri="{FF2B5EF4-FFF2-40B4-BE49-F238E27FC236}">
+                    <a16:creationId xmlns:a16="http://schemas.microsoft.com/office/drawing/2014/main" id="{71D6A823-DBDD-47B8-AD22-9C19C9D82425}"/>
+                  </a:ext>
+                </a:extLst>
+              </p:cNvPr>
+              <p:cNvPicPr/>
+              <p:nvPr/>
+            </p:nvPicPr>
+            <p:blipFill>
+              <a:blip r:embed="rId6"/>
+              <a:stretch>
+                <a:fillRect/>
+              </a:stretch>
+            </p:blipFill>
+            <p:spPr>
+              <a:xfrm>
+                <a:off x="295965" y="1419330"/>
+                <a:ext cx="3315240" cy="75600"/>
+              </a:xfrm>
+              <a:prstGeom prst="rect">
+                <a:avLst/>
+              </a:prstGeom>
+            </p:spPr>
+          </p:pic>
+        </mc:Fallback>
+      </mc:AlternateContent>
+      <mc:AlternateContent xmlns:mc="http://schemas.openxmlformats.org/markup-compatibility/2006">
+        <mc:Choice xmlns:p14="http://schemas.microsoft.com/office/powerpoint/2010/main" xmlns:aink="http://schemas.microsoft.com/office/drawing/2016/ink" Requires="p14 aink">
+          <p:contentPart p14:bwMode="auto" r:id="rId7">
+            <p14:nvContentPartPr>
+              <p14:cNvPr id="4" name="Рукописні дані 3">
+                <a:extLst>
+                  <a:ext uri="{FF2B5EF4-FFF2-40B4-BE49-F238E27FC236}">
+                    <a16:creationId xmlns:a16="http://schemas.microsoft.com/office/drawing/2014/main" id="{210CE764-C200-4A47-840C-FA77C9769C57}"/>
+                  </a:ext>
+                </a:extLst>
+              </p14:cNvPr>
+              <p14:cNvContentPartPr/>
+              <p14:nvPr/>
+            </p14:nvContentPartPr>
+            <p14:xfrm>
+              <a:off x="1428885" y="2257050"/>
+              <a:ext cx="1459440" cy="360"/>
+            </p14:xfrm>
+          </p:contentPart>
+        </mc:Choice>
+        <mc:Fallback>
+          <p:pic>
+            <p:nvPicPr>
+              <p:cNvPr id="4" name="Рукописні дані 3">
+                <a:extLst>
+                  <a:ext uri="{FF2B5EF4-FFF2-40B4-BE49-F238E27FC236}">
+                    <a16:creationId xmlns:a16="http://schemas.microsoft.com/office/drawing/2014/main" id="{210CE764-C200-4A47-840C-FA77C9769C57}"/>
+                  </a:ext>
+                </a:extLst>
+              </p:cNvPr>
+              <p:cNvPicPr/>
+              <p:nvPr/>
+            </p:nvPicPr>
+            <p:blipFill>
+              <a:blip r:embed="rId8"/>
+              <a:stretch>
+                <a:fillRect/>
+              </a:stretch>
+            </p:blipFill>
+            <p:spPr>
+              <a:xfrm>
+                <a:off x="1419885" y="2248410"/>
+                <a:ext cx="1477080" cy="18000"/>
+              </a:xfrm>
+              <a:prstGeom prst="rect">
+                <a:avLst/>
+              </a:prstGeom>
+            </p:spPr>
+          </p:pic>
+        </mc:Fallback>
+      </mc:AlternateContent>
+      <mc:AlternateContent xmlns:mc="http://schemas.openxmlformats.org/markup-compatibility/2006">
+        <mc:Choice xmlns:p14="http://schemas.microsoft.com/office/powerpoint/2010/main" xmlns:aink="http://schemas.microsoft.com/office/drawing/2016/ink" Requires="p14 aink">
+          <p:contentPart p14:bwMode="auto" r:id="rId9">
+            <p14:nvContentPartPr>
+              <p14:cNvPr id="5" name="Рукописні дані 4">
+                <a:extLst>
+                  <a:ext uri="{FF2B5EF4-FFF2-40B4-BE49-F238E27FC236}">
+                    <a16:creationId xmlns:a16="http://schemas.microsoft.com/office/drawing/2014/main" id="{762BCFC1-AC58-423F-948D-7EE03D190285}"/>
+                  </a:ext>
+                </a:extLst>
+              </p14:cNvPr>
+              <p14:cNvContentPartPr/>
+              <p14:nvPr/>
+            </p14:nvContentPartPr>
+            <p14:xfrm>
+              <a:off x="6915285" y="4152810"/>
+              <a:ext cx="2100600" cy="29160"/>
+            </p14:xfrm>
+          </p:contentPart>
+        </mc:Choice>
+        <mc:Fallback>
+          <p:pic>
+            <p:nvPicPr>
+              <p:cNvPr id="5" name="Рукописні дані 4">
+                <a:extLst>
+                  <a:ext uri="{FF2B5EF4-FFF2-40B4-BE49-F238E27FC236}">
+                    <a16:creationId xmlns:a16="http://schemas.microsoft.com/office/drawing/2014/main" id="{762BCFC1-AC58-423F-948D-7EE03D190285}"/>
+                  </a:ext>
+                </a:extLst>
+              </p:cNvPr>
+              <p:cNvPicPr/>
+              <p:nvPr/>
+            </p:nvPicPr>
+            <p:blipFill>
+              <a:blip r:embed="rId10"/>
+              <a:stretch>
+                <a:fillRect/>
+              </a:stretch>
+            </p:blipFill>
+            <p:spPr>
+              <a:xfrm>
+                <a:off x="6906285" y="4144170"/>
+                <a:ext cx="2118240" cy="46800"/>
+              </a:xfrm>
+              <a:prstGeom prst="rect">
+                <a:avLst/>
+              </a:prstGeom>
+            </p:spPr>
+          </p:pic>
+        </mc:Fallback>
+      </mc:AlternateContent>
+      <mc:AlternateContent xmlns:mc="http://schemas.openxmlformats.org/markup-compatibility/2006">
+        <mc:Choice xmlns:p14="http://schemas.microsoft.com/office/powerpoint/2010/main" xmlns:aink="http://schemas.microsoft.com/office/drawing/2016/ink" Requires="p14 aink">
+          <p:contentPart p14:bwMode="auto" r:id="rId11">
+            <p14:nvContentPartPr>
+              <p14:cNvPr id="6" name="Рукописні дані 5">
+                <a:extLst>
+                  <a:ext uri="{FF2B5EF4-FFF2-40B4-BE49-F238E27FC236}">
+                    <a16:creationId xmlns:a16="http://schemas.microsoft.com/office/drawing/2014/main" id="{2C2B1E69-E7EE-4D56-BF31-C65A6DFDB556}"/>
+                  </a:ext>
+                </a:extLst>
+              </p14:cNvPr>
+              <p14:cNvContentPartPr/>
+              <p14:nvPr/>
+            </p14:nvContentPartPr>
+            <p14:xfrm>
+              <a:off x="7305885" y="3314730"/>
+              <a:ext cx="360" cy="360"/>
+            </p14:xfrm>
+          </p:contentPart>
+        </mc:Choice>
+        <mc:Fallback>
+          <p:pic>
+            <p:nvPicPr>
+              <p:cNvPr id="6" name="Рукописні дані 5">
+                <a:extLst>
+                  <a:ext uri="{FF2B5EF4-FFF2-40B4-BE49-F238E27FC236}">
+                    <a16:creationId xmlns:a16="http://schemas.microsoft.com/office/drawing/2014/main" id="{2C2B1E69-E7EE-4D56-BF31-C65A6DFDB556}"/>
+                  </a:ext>
+                </a:extLst>
+              </p:cNvPr>
+              <p:cNvPicPr/>
+              <p:nvPr/>
+            </p:nvPicPr>
+            <p:blipFill>
+              <a:blip r:embed="rId12"/>
+              <a:stretch>
+                <a:fillRect/>
+              </a:stretch>
+            </p:blipFill>
+            <p:spPr>
+              <a:xfrm>
+                <a:off x="7296885" y="3305730"/>
+                <a:ext cx="18000" cy="18000"/>
+              </a:xfrm>
+              <a:prstGeom prst="rect">
+                <a:avLst/>
+              </a:prstGeom>
+            </p:spPr>
+          </p:pic>
+        </mc:Fallback>
+      </mc:AlternateContent>
+      <mc:AlternateContent xmlns:mc="http://schemas.openxmlformats.org/markup-compatibility/2006">
+        <mc:Choice xmlns:p14="http://schemas.microsoft.com/office/powerpoint/2010/main" xmlns:aink="http://schemas.microsoft.com/office/drawing/2016/ink" Requires="p14 aink">
+          <p:contentPart p14:bwMode="auto" r:id="rId13">
+            <p14:nvContentPartPr>
+              <p14:cNvPr id="7" name="Рукописні дані 6">
+                <a:extLst>
+                  <a:ext uri="{FF2B5EF4-FFF2-40B4-BE49-F238E27FC236}">
+                    <a16:creationId xmlns:a16="http://schemas.microsoft.com/office/drawing/2014/main" id="{CF17F8B3-D00A-45A6-957A-50095952A803}"/>
+                  </a:ext>
+                </a:extLst>
+              </p14:cNvPr>
+              <p14:cNvContentPartPr/>
+              <p14:nvPr/>
+            </p14:nvContentPartPr>
+            <p14:xfrm>
+              <a:off x="8401005" y="3857250"/>
+              <a:ext cx="360" cy="360"/>
+            </p14:xfrm>
+          </p:contentPart>
+        </mc:Choice>
+        <mc:Fallback>
+          <p:pic>
+            <p:nvPicPr>
+              <p:cNvPr id="7" name="Рукописні дані 6">
+                <a:extLst>
+                  <a:ext uri="{FF2B5EF4-FFF2-40B4-BE49-F238E27FC236}">
+                    <a16:creationId xmlns:a16="http://schemas.microsoft.com/office/drawing/2014/main" id="{CF17F8B3-D00A-45A6-957A-50095952A803}"/>
+                  </a:ext>
+                </a:extLst>
+              </p:cNvPr>
+              <p:cNvPicPr/>
+              <p:nvPr/>
+            </p:nvPicPr>
+            <p:blipFill>
+              <a:blip r:embed="rId14"/>
+              <a:stretch>
+                <a:fillRect/>
+              </a:stretch>
+            </p:blipFill>
+            <p:spPr>
+              <a:xfrm>
+                <a:off x="8392365" y="3848610"/>
+                <a:ext cx="18000" cy="18000"/>
+              </a:xfrm>
+              <a:prstGeom prst="rect">
+                <a:avLst/>
+              </a:prstGeom>
+            </p:spPr>
+          </p:pic>
+        </mc:Fallback>
+      </mc:AlternateContent>
     </p:spTree>
   </p:cSld>
   <p:clrMapOvr>
@@ -13015,6 +14482,57 @@
           </a:p>
         </p:txBody>
       </p:sp>
+      <mc:AlternateContent xmlns:mc="http://schemas.openxmlformats.org/markup-compatibility/2006">
+        <mc:Choice xmlns:p14="http://schemas.microsoft.com/office/powerpoint/2010/main" xmlns:aink="http://schemas.microsoft.com/office/drawing/2016/ink" Requires="p14 aink">
+          <p:contentPart p14:bwMode="auto" r:id="rId3">
+            <p14:nvContentPartPr>
+              <p14:cNvPr id="2" name="Рукописні дані 1">
+                <a:extLst>
+                  <a:ext uri="{FF2B5EF4-FFF2-40B4-BE49-F238E27FC236}">
+                    <a16:creationId xmlns:a16="http://schemas.microsoft.com/office/drawing/2014/main" id="{444F0641-30A7-4EA5-949C-90A47B069756}"/>
+                  </a:ext>
+                </a:extLst>
+              </p14:cNvPr>
+              <p14:cNvContentPartPr/>
+              <p14:nvPr/>
+            </p14:nvContentPartPr>
+            <p14:xfrm>
+              <a:off x="6181605" y="1323900"/>
+              <a:ext cx="360" cy="360"/>
+            </p14:xfrm>
+          </p:contentPart>
+        </mc:Choice>
+        <mc:Fallback>
+          <p:pic>
+            <p:nvPicPr>
+              <p:cNvPr id="2" name="Рукописні дані 1">
+                <a:extLst>
+                  <a:ext uri="{FF2B5EF4-FFF2-40B4-BE49-F238E27FC236}">
+                    <a16:creationId xmlns:a16="http://schemas.microsoft.com/office/drawing/2014/main" id="{444F0641-30A7-4EA5-949C-90A47B069756}"/>
+                  </a:ext>
+                </a:extLst>
+              </p:cNvPr>
+              <p:cNvPicPr/>
+              <p:nvPr/>
+            </p:nvPicPr>
+            <p:blipFill>
+              <a:blip r:embed="rId4"/>
+              <a:stretch>
+                <a:fillRect/>
+              </a:stretch>
+            </p:blipFill>
+            <p:spPr>
+              <a:xfrm>
+                <a:off x="6172965" y="1315260"/>
+                <a:ext cx="18000" cy="18000"/>
+              </a:xfrm>
+              <a:prstGeom prst="rect">
+                <a:avLst/>
+              </a:prstGeom>
+            </p:spPr>
+          </p:pic>
+        </mc:Fallback>
+      </mc:AlternateContent>
     </p:spTree>
   </p:cSld>
   <p:clrMapOvr>
@@ -13085,7 +14603,7 @@
         </p:nvGraphicFramePr>
         <p:xfrm>
           <a:off x="2752725" y="2051051"/>
-          <a:ext cx="4000000" cy="4000000"/>
+          <a:ext cx="6096000" cy="520320"/>
         </p:xfrm>
         <a:graphic>
           <a:graphicData uri="http://schemas.openxmlformats.org/drawingml/2006/table">
@@ -13544,7 +15062,7 @@
         </p:nvGraphicFramePr>
         <p:xfrm>
           <a:off x="2773363" y="1517651"/>
-          <a:ext cx="4000000" cy="4000000"/>
+          <a:ext cx="6096000" cy="506433"/>
         </p:xfrm>
         <a:graphic>
           <a:graphicData uri="http://schemas.openxmlformats.org/drawingml/2006/table">
@@ -15945,6 +17463,57 @@
           </a:p>
         </p:txBody>
       </p:sp>
+      <mc:AlternateContent xmlns:mc="http://schemas.openxmlformats.org/markup-compatibility/2006">
+        <mc:Choice xmlns:p14="http://schemas.microsoft.com/office/powerpoint/2010/main" xmlns:aink="http://schemas.microsoft.com/office/drawing/2016/ink" Requires="p14 aink">
+          <p:contentPart p14:bwMode="auto" r:id="rId3">
+            <p14:nvContentPartPr>
+              <p14:cNvPr id="11" name="Рукописні дані 10">
+                <a:extLst>
+                  <a:ext uri="{FF2B5EF4-FFF2-40B4-BE49-F238E27FC236}">
+                    <a16:creationId xmlns:a16="http://schemas.microsoft.com/office/drawing/2014/main" id="{F2AE2047-DB56-4DED-A09B-89ACD50695D2}"/>
+                  </a:ext>
+                </a:extLst>
+              </p14:cNvPr>
+              <p14:cNvContentPartPr/>
+              <p14:nvPr/>
+            </p14:nvContentPartPr>
+            <p14:xfrm>
+              <a:off x="10020285" y="5978340"/>
+              <a:ext cx="596880" cy="127080"/>
+            </p14:xfrm>
+          </p:contentPart>
+        </mc:Choice>
+        <mc:Fallback>
+          <p:pic>
+            <p:nvPicPr>
+              <p:cNvPr id="11" name="Рукописні дані 10">
+                <a:extLst>
+                  <a:ext uri="{FF2B5EF4-FFF2-40B4-BE49-F238E27FC236}">
+                    <a16:creationId xmlns:a16="http://schemas.microsoft.com/office/drawing/2014/main" id="{F2AE2047-DB56-4DED-A09B-89ACD50695D2}"/>
+                  </a:ext>
+                </a:extLst>
+              </p:cNvPr>
+              <p:cNvPicPr/>
+              <p:nvPr/>
+            </p:nvPicPr>
+            <p:blipFill>
+              <a:blip r:embed="rId4"/>
+              <a:stretch>
+                <a:fillRect/>
+              </a:stretch>
+            </p:blipFill>
+            <p:spPr>
+              <a:xfrm>
+                <a:off x="10011285" y="5969340"/>
+                <a:ext cx="614520" cy="144720"/>
+              </a:xfrm>
+              <a:prstGeom prst="rect">
+                <a:avLst/>
+              </a:prstGeom>
+            </p:spPr>
+          </p:pic>
+        </mc:Fallback>
+      </mc:AlternateContent>
     </p:spTree>
   </p:cSld>
   <p:clrMapOvr>
@@ -16143,7 +17712,7 @@
               </a:lnSpc>
             </a:pPr>
             <a:r>
-              <a:rPr lang="uk" sz="1400">
+              <a:rPr lang="uk" sz="1400" dirty="0">
                 <a:solidFill>
                   <a:srgbClr val="006699"/>
                 </a:solidFill>
@@ -16158,7 +17727,7 @@
               <a:t>int</a:t>
             </a:r>
             <a:r>
-              <a:rPr lang="uk" sz="1400">
+              <a:rPr lang="uk" sz="1400" dirty="0">
                 <a:solidFill>
                   <a:srgbClr val="188038"/>
                 </a:solidFill>
@@ -16172,7 +17741,7 @@
               </a:rPr>
               <a:t>[] numbers = { 1, 2, 3, 5 };</a:t>
             </a:r>
-            <a:endParaRPr sz="1400">
+            <a:endParaRPr sz="1400" dirty="0">
               <a:solidFill>
                 <a:srgbClr val="188038"/>
               </a:solidFill>
@@ -16192,7 +17761,7 @@
               </a:lnSpc>
             </a:pPr>
             <a:r>
-              <a:rPr lang="uk" sz="1400">
+              <a:rPr lang="uk" sz="1400" dirty="0">
                 <a:solidFill>
                   <a:schemeClr val="dk1"/>
                 </a:solidFill>
@@ -16206,7 +17775,7 @@
               </a:rPr>
               <a:t> </a:t>
             </a:r>
-            <a:endParaRPr sz="1400">
+            <a:endParaRPr sz="1400" dirty="0">
               <a:solidFill>
                 <a:schemeClr val="dk1"/>
               </a:solidFill>
@@ -16226,7 +17795,7 @@
               </a:lnSpc>
             </a:pPr>
             <a:r>
-              <a:rPr lang="uk" sz="1400">
+              <a:rPr lang="uk" sz="1400" dirty="0">
                 <a:solidFill>
                   <a:srgbClr val="008200"/>
                 </a:solidFill>
@@ -16240,7 +17809,7 @@
               </a:rPr>
               <a:t>// получение элемента массива</a:t>
             </a:r>
-            <a:endParaRPr sz="1400">
+            <a:endParaRPr sz="1400" dirty="0">
               <a:solidFill>
                 <a:srgbClr val="008200"/>
               </a:solidFill>
@@ -16260,7 +17829,7 @@
               </a:lnSpc>
             </a:pPr>
             <a:r>
-              <a:rPr lang="uk" sz="1400">
+              <a:rPr lang="uk" sz="1400" dirty="0">
                 <a:solidFill>
                   <a:srgbClr val="188038"/>
                 </a:solidFill>
@@ -16275,7 +17844,7 @@
               <a:t>Console.WriteLine(numbers[3]);  </a:t>
             </a:r>
             <a:r>
-              <a:rPr lang="uk" sz="1400">
+              <a:rPr lang="uk" sz="1400" dirty="0">
                 <a:solidFill>
                   <a:srgbClr val="008200"/>
                 </a:solidFill>
@@ -16289,7 +17858,7 @@
               </a:rPr>
               <a:t>// 5</a:t>
             </a:r>
-            <a:endParaRPr sz="1400">
+            <a:endParaRPr sz="1400" dirty="0">
               <a:solidFill>
                 <a:srgbClr val="008200"/>
               </a:solidFill>
@@ -16309,7 +17878,7 @@
               </a:lnSpc>
             </a:pPr>
             <a:r>
-              <a:rPr lang="uk" sz="1400">
+              <a:rPr lang="uk" sz="1400" dirty="0">
                 <a:solidFill>
                   <a:schemeClr val="dk1"/>
                 </a:solidFill>
@@ -16323,7 +17892,7 @@
               </a:rPr>
               <a:t> </a:t>
             </a:r>
-            <a:endParaRPr sz="1400">
+            <a:endParaRPr sz="1400" dirty="0">
               <a:solidFill>
                 <a:schemeClr val="dk1"/>
               </a:solidFill>
@@ -16343,7 +17912,7 @@
               </a:lnSpc>
             </a:pPr>
             <a:r>
-              <a:rPr lang="uk" sz="1400">
+              <a:rPr lang="uk" sz="1400" dirty="0">
                 <a:solidFill>
                   <a:srgbClr val="008200"/>
                 </a:solidFill>
@@ -16357,7 +17926,7 @@
               </a:rPr>
               <a:t>// получение элемента массива в переменную</a:t>
             </a:r>
-            <a:endParaRPr sz="1400">
+            <a:endParaRPr sz="1400" dirty="0">
               <a:solidFill>
                 <a:srgbClr val="008200"/>
               </a:solidFill>
@@ -16377,7 +17946,7 @@
               </a:lnSpc>
             </a:pPr>
             <a:r>
-              <a:rPr lang="uk" sz="1400">
+              <a:rPr lang="uk" sz="1400" dirty="0">
                 <a:solidFill>
                   <a:srgbClr val="188038"/>
                 </a:solidFill>
@@ -16392,7 +17961,7 @@
               <a:t>var n = numbers[1]; 	</a:t>
             </a:r>
             <a:r>
-              <a:rPr lang="uk" sz="1400">
+              <a:rPr lang="uk" sz="1400" dirty="0">
                 <a:solidFill>
                   <a:srgbClr val="008200"/>
                 </a:solidFill>
@@ -16406,7 +17975,7 @@
               </a:rPr>
               <a:t>// 2</a:t>
             </a:r>
-            <a:endParaRPr sz="1400">
+            <a:endParaRPr sz="1400" dirty="0">
               <a:solidFill>
                 <a:srgbClr val="008200"/>
               </a:solidFill>
@@ -16426,7 +17995,7 @@
               </a:lnSpc>
             </a:pPr>
             <a:r>
-              <a:rPr lang="uk" sz="1400">
+              <a:rPr lang="uk" sz="1400" dirty="0">
                 <a:solidFill>
                   <a:srgbClr val="188038"/>
                 </a:solidFill>
@@ -16441,7 +18010,7 @@
               <a:t>Console.WriteLine(n);  </a:t>
             </a:r>
             <a:r>
-              <a:rPr lang="uk" sz="1400">
+              <a:rPr lang="uk" sz="1400" dirty="0">
                 <a:solidFill>
                   <a:srgbClr val="008200"/>
                 </a:solidFill>
@@ -16455,7 +18024,7 @@
               </a:rPr>
               <a:t>// 2</a:t>
             </a:r>
-            <a:endParaRPr sz="1400">
+            <a:endParaRPr sz="1400" dirty="0">
               <a:solidFill>
                 <a:srgbClr val="008200"/>
               </a:solidFill>
@@ -16470,6 +18039,384 @@
           </a:p>
         </p:txBody>
       </p:sp>
+      <mc:AlternateContent xmlns:mc="http://schemas.openxmlformats.org/markup-compatibility/2006">
+        <mc:Choice xmlns:p14="http://schemas.microsoft.com/office/powerpoint/2010/main" xmlns:aink="http://schemas.microsoft.com/office/drawing/2016/ink" Requires="p14 aink">
+          <p:contentPart p14:bwMode="auto" r:id="rId3">
+            <p14:nvContentPartPr>
+              <p14:cNvPr id="2" name="Рукописні дані 1">
+                <a:extLst>
+                  <a:ext uri="{FF2B5EF4-FFF2-40B4-BE49-F238E27FC236}">
+                    <a16:creationId xmlns:a16="http://schemas.microsoft.com/office/drawing/2014/main" id="{9DF9378E-B966-4F81-9D8F-6F3429B9F8BF}"/>
+                  </a:ext>
+                </a:extLst>
+              </p14:cNvPr>
+              <p14:cNvContentPartPr/>
+              <p14:nvPr/>
+            </p14:nvContentPartPr>
+            <p14:xfrm>
+              <a:off x="1419165" y="5666940"/>
+              <a:ext cx="1081080" cy="48600"/>
+            </p14:xfrm>
+          </p:contentPart>
+        </mc:Choice>
+        <mc:Fallback>
+          <p:pic>
+            <p:nvPicPr>
+              <p:cNvPr id="2" name="Рукописні дані 1">
+                <a:extLst>
+                  <a:ext uri="{FF2B5EF4-FFF2-40B4-BE49-F238E27FC236}">
+                    <a16:creationId xmlns:a16="http://schemas.microsoft.com/office/drawing/2014/main" id="{9DF9378E-B966-4F81-9D8F-6F3429B9F8BF}"/>
+                  </a:ext>
+                </a:extLst>
+              </p:cNvPr>
+              <p:cNvPicPr/>
+              <p:nvPr/>
+            </p:nvPicPr>
+            <p:blipFill>
+              <a:blip r:embed="rId4"/>
+              <a:stretch>
+                <a:fillRect/>
+              </a:stretch>
+            </p:blipFill>
+            <p:spPr>
+              <a:xfrm>
+                <a:off x="1410525" y="5658300"/>
+                <a:ext cx="1098720" cy="66240"/>
+              </a:xfrm>
+              <a:prstGeom prst="rect">
+                <a:avLst/>
+              </a:prstGeom>
+            </p:spPr>
+          </p:pic>
+        </mc:Fallback>
+      </mc:AlternateContent>
+      <mc:AlternateContent xmlns:mc="http://schemas.openxmlformats.org/markup-compatibility/2006">
+        <mc:Choice xmlns:p14="http://schemas.microsoft.com/office/powerpoint/2010/main" xmlns:aink="http://schemas.microsoft.com/office/drawing/2016/ink" Requires="p14 aink">
+          <p:contentPart p14:bwMode="auto" r:id="rId5">
+            <p14:nvContentPartPr>
+              <p14:cNvPr id="16" name="Рукописні дані 15">
+                <a:extLst>
+                  <a:ext uri="{FF2B5EF4-FFF2-40B4-BE49-F238E27FC236}">
+                    <a16:creationId xmlns:a16="http://schemas.microsoft.com/office/drawing/2014/main" id="{AF2EA35A-EC2C-48A1-8829-550195D2E67F}"/>
+                  </a:ext>
+                </a:extLst>
+              </p14:cNvPr>
+              <p14:cNvContentPartPr/>
+              <p14:nvPr/>
+            </p14:nvContentPartPr>
+            <p14:xfrm>
+              <a:off x="7972965" y="4754340"/>
+              <a:ext cx="2037960" cy="492480"/>
+            </p14:xfrm>
+          </p:contentPart>
+        </mc:Choice>
+        <mc:Fallback>
+          <p:pic>
+            <p:nvPicPr>
+              <p:cNvPr id="16" name="Рукописні дані 15">
+                <a:extLst>
+                  <a:ext uri="{FF2B5EF4-FFF2-40B4-BE49-F238E27FC236}">
+                    <a16:creationId xmlns:a16="http://schemas.microsoft.com/office/drawing/2014/main" id="{AF2EA35A-EC2C-48A1-8829-550195D2E67F}"/>
+                  </a:ext>
+                </a:extLst>
+              </p:cNvPr>
+              <p:cNvPicPr/>
+              <p:nvPr/>
+            </p:nvPicPr>
+            <p:blipFill>
+              <a:blip r:embed="rId6"/>
+              <a:stretch>
+                <a:fillRect/>
+              </a:stretch>
+            </p:blipFill>
+            <p:spPr>
+              <a:xfrm>
+                <a:off x="7963965" y="4745340"/>
+                <a:ext cx="2055600" cy="510120"/>
+              </a:xfrm>
+              <a:prstGeom prst="rect">
+                <a:avLst/>
+              </a:prstGeom>
+            </p:spPr>
+          </p:pic>
+        </mc:Fallback>
+      </mc:AlternateContent>
+      <p:grpSp>
+        <p:nvGrpSpPr>
+          <p:cNvPr id="35" name="Групувати 34">
+            <a:extLst>
+              <a:ext uri="{FF2B5EF4-FFF2-40B4-BE49-F238E27FC236}">
+                <a16:creationId xmlns:a16="http://schemas.microsoft.com/office/drawing/2014/main" id="{C4034062-FFA0-464F-8FEA-EDA338072765}"/>
+              </a:ext>
+            </a:extLst>
+          </p:cNvPr>
+          <p:cNvGrpSpPr/>
+          <p:nvPr/>
+        </p:nvGrpSpPr>
+        <p:grpSpPr>
+          <a:xfrm>
+            <a:off x="8524845" y="3685860"/>
+            <a:ext cx="1247400" cy="905040"/>
+            <a:chOff x="8524845" y="3685860"/>
+            <a:chExt cx="1247400" cy="905040"/>
+          </a:xfrm>
+        </p:grpSpPr>
+        <mc:AlternateContent xmlns:mc="http://schemas.openxmlformats.org/markup-compatibility/2006">
+          <mc:Choice xmlns:p14="http://schemas.microsoft.com/office/powerpoint/2010/main" xmlns:aink="http://schemas.microsoft.com/office/drawing/2016/ink" Requires="p14 aink">
+            <p:contentPart p14:bwMode="auto" r:id="rId7">
+              <p14:nvContentPartPr>
+                <p14:cNvPr id="31" name="Рукописні дані 30">
+                  <a:extLst>
+                    <a:ext uri="{FF2B5EF4-FFF2-40B4-BE49-F238E27FC236}">
+                      <a16:creationId xmlns:a16="http://schemas.microsoft.com/office/drawing/2014/main" id="{57D84BC8-88A5-4727-B8D3-2685CBD22AC3}"/>
+                    </a:ext>
+                  </a:extLst>
+                </p14:cNvPr>
+                <p14:cNvContentPartPr/>
+                <p14:nvPr/>
+              </p14:nvContentPartPr>
+              <p14:xfrm>
+                <a:off x="8618085" y="3892860"/>
+                <a:ext cx="307080" cy="698040"/>
+              </p14:xfrm>
+            </p:contentPart>
+          </mc:Choice>
+          <mc:Fallback>
+            <p:pic>
+              <p:nvPicPr>
+                <p:cNvPr id="31" name="Рукописні дані 30">
+                  <a:extLst>
+                    <a:ext uri="{FF2B5EF4-FFF2-40B4-BE49-F238E27FC236}">
+                      <a16:creationId xmlns:a16="http://schemas.microsoft.com/office/drawing/2014/main" id="{57D84BC8-88A5-4727-B8D3-2685CBD22AC3}"/>
+                    </a:ext>
+                  </a:extLst>
+                </p:cNvPr>
+                <p:cNvPicPr/>
+                <p:nvPr/>
+              </p:nvPicPr>
+              <p:blipFill>
+                <a:blip r:embed="rId8"/>
+                <a:stretch>
+                  <a:fillRect/>
+                </a:stretch>
+              </p:blipFill>
+              <p:spPr>
+                <a:xfrm>
+                  <a:off x="8609085" y="3884220"/>
+                  <a:ext cx="324720" cy="715680"/>
+                </a:xfrm>
+                <a:prstGeom prst="rect">
+                  <a:avLst/>
+                </a:prstGeom>
+              </p:spPr>
+            </p:pic>
+          </mc:Fallback>
+        </mc:AlternateContent>
+        <mc:AlternateContent xmlns:mc="http://schemas.openxmlformats.org/markup-compatibility/2006">
+          <mc:Choice xmlns:p14="http://schemas.microsoft.com/office/powerpoint/2010/main" xmlns:aink="http://schemas.microsoft.com/office/drawing/2016/ink" Requires="p14 aink">
+            <p:contentPart p14:bwMode="auto" r:id="rId9">
+              <p14:nvContentPartPr>
+                <p14:cNvPr id="32" name="Рукописні дані 31">
+                  <a:extLst>
+                    <a:ext uri="{FF2B5EF4-FFF2-40B4-BE49-F238E27FC236}">
+                      <a16:creationId xmlns:a16="http://schemas.microsoft.com/office/drawing/2014/main" id="{6A77594A-0F5D-45C6-B460-99972CBA57B1}"/>
+                    </a:ext>
+                  </a:extLst>
+                </p14:cNvPr>
+                <p14:cNvContentPartPr/>
+                <p14:nvPr/>
+              </p14:nvContentPartPr>
+              <p14:xfrm>
+                <a:off x="8524845" y="3685860"/>
+                <a:ext cx="63720" cy="173520"/>
+              </p14:xfrm>
+            </p:contentPart>
+          </mc:Choice>
+          <mc:Fallback>
+            <p:pic>
+              <p:nvPicPr>
+                <p:cNvPr id="32" name="Рукописні дані 31">
+                  <a:extLst>
+                    <a:ext uri="{FF2B5EF4-FFF2-40B4-BE49-F238E27FC236}">
+                      <a16:creationId xmlns:a16="http://schemas.microsoft.com/office/drawing/2014/main" id="{6A77594A-0F5D-45C6-B460-99972CBA57B1}"/>
+                    </a:ext>
+                  </a:extLst>
+                </p:cNvPr>
+                <p:cNvPicPr/>
+                <p:nvPr/>
+              </p:nvPicPr>
+              <p:blipFill>
+                <a:blip r:embed="rId10"/>
+                <a:stretch>
+                  <a:fillRect/>
+                </a:stretch>
+              </p:blipFill>
+              <p:spPr>
+                <a:xfrm>
+                  <a:off x="8515845" y="3677220"/>
+                  <a:ext cx="81360" cy="191160"/>
+                </a:xfrm>
+                <a:prstGeom prst="rect">
+                  <a:avLst/>
+                </a:prstGeom>
+              </p:spPr>
+            </p:pic>
+          </mc:Fallback>
+        </mc:AlternateContent>
+        <mc:AlternateContent xmlns:mc="http://schemas.openxmlformats.org/markup-compatibility/2006">
+          <mc:Choice xmlns:p14="http://schemas.microsoft.com/office/powerpoint/2010/main" xmlns:aink="http://schemas.microsoft.com/office/drawing/2016/ink" Requires="p14 aink">
+            <p:contentPart p14:bwMode="auto" r:id="rId11">
+              <p14:nvContentPartPr>
+                <p14:cNvPr id="33" name="Рукописні дані 32">
+                  <a:extLst>
+                    <a:ext uri="{FF2B5EF4-FFF2-40B4-BE49-F238E27FC236}">
+                      <a16:creationId xmlns:a16="http://schemas.microsoft.com/office/drawing/2014/main" id="{E27C18BC-412B-4F24-A228-9E4720933CB0}"/>
+                    </a:ext>
+                  </a:extLst>
+                </p14:cNvPr>
+                <p14:cNvContentPartPr/>
+                <p14:nvPr/>
+              </p14:nvContentPartPr>
+              <p14:xfrm>
+                <a:off x="9201285" y="4047660"/>
+                <a:ext cx="308880" cy="484560"/>
+              </p14:xfrm>
+            </p:contentPart>
+          </mc:Choice>
+          <mc:Fallback>
+            <p:pic>
+              <p:nvPicPr>
+                <p:cNvPr id="33" name="Рукописні дані 32">
+                  <a:extLst>
+                    <a:ext uri="{FF2B5EF4-FFF2-40B4-BE49-F238E27FC236}">
+                      <a16:creationId xmlns:a16="http://schemas.microsoft.com/office/drawing/2014/main" id="{E27C18BC-412B-4F24-A228-9E4720933CB0}"/>
+                    </a:ext>
+                  </a:extLst>
+                </p:cNvPr>
+                <p:cNvPicPr/>
+                <p:nvPr/>
+              </p:nvPicPr>
+              <p:blipFill>
+                <a:blip r:embed="rId12"/>
+                <a:stretch>
+                  <a:fillRect/>
+                </a:stretch>
+              </p:blipFill>
+              <p:spPr>
+                <a:xfrm>
+                  <a:off x="9192285" y="4039020"/>
+                  <a:ext cx="326520" cy="502200"/>
+                </a:xfrm>
+                <a:prstGeom prst="rect">
+                  <a:avLst/>
+                </a:prstGeom>
+              </p:spPr>
+            </p:pic>
+          </mc:Fallback>
+        </mc:AlternateContent>
+        <mc:AlternateContent xmlns:mc="http://schemas.openxmlformats.org/markup-compatibility/2006">
+          <mc:Choice xmlns:p14="http://schemas.microsoft.com/office/powerpoint/2010/main" xmlns:aink="http://schemas.microsoft.com/office/drawing/2016/ink" Requires="p14 aink">
+            <p:contentPart p14:bwMode="auto" r:id="rId13">
+              <p14:nvContentPartPr>
+                <p14:cNvPr id="34" name="Рукописні дані 33">
+                  <a:extLst>
+                    <a:ext uri="{FF2B5EF4-FFF2-40B4-BE49-F238E27FC236}">
+                      <a16:creationId xmlns:a16="http://schemas.microsoft.com/office/drawing/2014/main" id="{07B50A26-4BDC-4200-AE17-DE5D30B0FF5B}"/>
+                    </a:ext>
+                  </a:extLst>
+                </p14:cNvPr>
+                <p14:cNvContentPartPr/>
+                <p14:nvPr/>
+              </p14:nvContentPartPr>
+              <p14:xfrm>
+                <a:off x="9421965" y="3800340"/>
+                <a:ext cx="350280" cy="563760"/>
+              </p14:xfrm>
+            </p:contentPart>
+          </mc:Choice>
+          <mc:Fallback>
+            <p:pic>
+              <p:nvPicPr>
+                <p:cNvPr id="34" name="Рукописні дані 33">
+                  <a:extLst>
+                    <a:ext uri="{FF2B5EF4-FFF2-40B4-BE49-F238E27FC236}">
+                      <a16:creationId xmlns:a16="http://schemas.microsoft.com/office/drawing/2014/main" id="{07B50A26-4BDC-4200-AE17-DE5D30B0FF5B}"/>
+                    </a:ext>
+                  </a:extLst>
+                </p:cNvPr>
+                <p:cNvPicPr/>
+                <p:nvPr/>
+              </p:nvPicPr>
+              <p:blipFill>
+                <a:blip r:embed="rId14"/>
+                <a:stretch>
+                  <a:fillRect/>
+                </a:stretch>
+              </p:blipFill>
+              <p:spPr>
+                <a:xfrm>
+                  <a:off x="9413325" y="3791340"/>
+                  <a:ext cx="367920" cy="581400"/>
+                </a:xfrm>
+                <a:prstGeom prst="rect">
+                  <a:avLst/>
+                </a:prstGeom>
+              </p:spPr>
+            </p:pic>
+          </mc:Fallback>
+        </mc:AlternateContent>
+      </p:grpSp>
+      <mc:AlternateContent xmlns:mc="http://schemas.openxmlformats.org/markup-compatibility/2006">
+        <mc:Choice xmlns:p14="http://schemas.microsoft.com/office/powerpoint/2010/main" Requires="p14">
+          <p:contentPart p14:bwMode="auto" r:id="rId15">
+            <p14:nvContentPartPr>
+              <p14:cNvPr id="44" name="Рукописні дані 43">
+                <a:extLst>
+                  <a:ext uri="{FF2B5EF4-FFF2-40B4-BE49-F238E27FC236}">
+                    <a16:creationId xmlns:a16="http://schemas.microsoft.com/office/drawing/2014/main" id="{41F785BC-D9D1-464D-985B-530298A200DC}"/>
+                  </a:ext>
+                </a:extLst>
+              </p14:cNvPr>
+              <p14:cNvContentPartPr/>
+              <p14:nvPr/>
+            </p14:nvContentPartPr>
+            <p14:xfrm>
+              <a:off x="371205" y="5752260"/>
+              <a:ext cx="495360" cy="10080"/>
+            </p14:xfrm>
+          </p:contentPart>
+        </mc:Choice>
+        <mc:Fallback>
+          <p:pic>
+            <p:nvPicPr>
+              <p:cNvPr id="44" name="Рукописні дані 43">
+                <a:extLst>
+                  <a:ext uri="{FF2B5EF4-FFF2-40B4-BE49-F238E27FC236}">
+                    <a16:creationId xmlns:a16="http://schemas.microsoft.com/office/drawing/2014/main" id="{41F785BC-D9D1-464D-985B-530298A200DC}"/>
+                  </a:ext>
+                </a:extLst>
+              </p:cNvPr>
+              <p:cNvPicPr/>
+              <p:nvPr/>
+            </p:nvPicPr>
+            <p:blipFill>
+              <a:blip r:embed="rId16"/>
+              <a:stretch>
+                <a:fillRect/>
+              </a:stretch>
+            </p:blipFill>
+            <p:spPr>
+              <a:xfrm>
+                <a:off x="362565" y="5743620"/>
+                <a:ext cx="513000" cy="27720"/>
+              </a:xfrm>
+              <a:prstGeom prst="rect">
+                <a:avLst/>
+              </a:prstGeom>
+            </p:spPr>
+          </p:pic>
+        </mc:Fallback>
+      </mc:AlternateContent>
     </p:spTree>
   </p:cSld>
   <p:clrMapOvr>
@@ -17048,6 +18995,57 @@
           </a:p>
         </p:txBody>
       </p:sp>
+      <mc:AlternateContent xmlns:mc="http://schemas.openxmlformats.org/markup-compatibility/2006" xmlns:p14="http://schemas.microsoft.com/office/powerpoint/2010/main">
+        <mc:Choice Requires="p14">
+          <p:contentPart p14:bwMode="auto" r:id="rId3">
+            <p14:nvContentPartPr>
+              <p14:cNvPr id="2" name="Рукописні дані 1">
+                <a:extLst>
+                  <a:ext uri="{FF2B5EF4-FFF2-40B4-BE49-F238E27FC236}">
+                    <a16:creationId xmlns:a16="http://schemas.microsoft.com/office/drawing/2014/main" id="{33B67BA6-970A-418F-AFCE-E6E5AF06459C}"/>
+                  </a:ext>
+                </a:extLst>
+              </p14:cNvPr>
+              <p14:cNvContentPartPr/>
+              <p14:nvPr/>
+            </p14:nvContentPartPr>
+            <p14:xfrm>
+              <a:off x="2238165" y="3171780"/>
+              <a:ext cx="360" cy="360"/>
+            </p14:xfrm>
+          </p:contentPart>
+        </mc:Choice>
+        <mc:Fallback xmlns="">
+          <p:pic>
+            <p:nvPicPr>
+              <p:cNvPr id="2" name="Рукописні дані 1">
+                <a:extLst>
+                  <a:ext uri="{FF2B5EF4-FFF2-40B4-BE49-F238E27FC236}">
+                    <a16:creationId xmlns:a16="http://schemas.microsoft.com/office/drawing/2014/main" id="{33B67BA6-970A-418F-AFCE-E6E5AF06459C}"/>
+                  </a:ext>
+                </a:extLst>
+              </p:cNvPr>
+              <p:cNvPicPr/>
+              <p:nvPr/>
+            </p:nvPicPr>
+            <p:blipFill>
+              <a:blip r:embed="rId4"/>
+              <a:stretch>
+                <a:fillRect/>
+              </a:stretch>
+            </p:blipFill>
+            <p:spPr>
+              <a:xfrm>
+                <a:off x="2229525" y="3162780"/>
+                <a:ext cx="18000" cy="18000"/>
+              </a:xfrm>
+              <a:prstGeom prst="rect">
+                <a:avLst/>
+              </a:prstGeom>
+            </p:spPr>
+          </p:pic>
+        </mc:Fallback>
+      </mc:AlternateContent>
     </p:spTree>
   </p:cSld>
   <p:clrMapOvr>
@@ -17446,6 +19444,57 @@
           </a:p>
         </p:txBody>
       </p:sp>
+      <mc:AlternateContent xmlns:mc="http://schemas.openxmlformats.org/markup-compatibility/2006">
+        <mc:Choice xmlns:p14="http://schemas.microsoft.com/office/powerpoint/2010/main" xmlns:aink="http://schemas.microsoft.com/office/drawing/2016/ink" Requires="p14 aink">
+          <p:contentPart p14:bwMode="auto" r:id="rId3">
+            <p14:nvContentPartPr>
+              <p14:cNvPr id="2" name="Рукописні дані 1">
+                <a:extLst>
+                  <a:ext uri="{FF2B5EF4-FFF2-40B4-BE49-F238E27FC236}">
+                    <a16:creationId xmlns:a16="http://schemas.microsoft.com/office/drawing/2014/main" id="{41077FB2-35F2-4679-9699-DCE50844FDE1}"/>
+                  </a:ext>
+                </a:extLst>
+              </p14:cNvPr>
+              <p14:cNvContentPartPr/>
+              <p14:nvPr/>
+            </p14:nvContentPartPr>
+            <p14:xfrm>
+              <a:off x="2428605" y="3070620"/>
+              <a:ext cx="1569960" cy="140400"/>
+            </p14:xfrm>
+          </p:contentPart>
+        </mc:Choice>
+        <mc:Fallback>
+          <p:pic>
+            <p:nvPicPr>
+              <p:cNvPr id="2" name="Рукописні дані 1">
+                <a:extLst>
+                  <a:ext uri="{FF2B5EF4-FFF2-40B4-BE49-F238E27FC236}">
+                    <a16:creationId xmlns:a16="http://schemas.microsoft.com/office/drawing/2014/main" id="{41077FB2-35F2-4679-9699-DCE50844FDE1}"/>
+                  </a:ext>
+                </a:extLst>
+              </p:cNvPr>
+              <p:cNvPicPr/>
+              <p:nvPr/>
+            </p:nvPicPr>
+            <p:blipFill>
+              <a:blip r:embed="rId4"/>
+              <a:stretch>
+                <a:fillRect/>
+              </a:stretch>
+            </p:blipFill>
+            <p:spPr>
+              <a:xfrm>
+                <a:off x="2419965" y="3061980"/>
+                <a:ext cx="1587600" cy="158040"/>
+              </a:xfrm>
+              <a:prstGeom prst="rect">
+                <a:avLst/>
+              </a:prstGeom>
+            </p:spPr>
+          </p:pic>
+        </mc:Fallback>
+      </mc:AlternateContent>
     </p:spTree>
   </p:cSld>
   <p:clrMapOvr>
@@ -17862,6 +19911,210 @@
           </a:p>
         </p:txBody>
       </p:sp>
+      <mc:AlternateContent xmlns:mc="http://schemas.openxmlformats.org/markup-compatibility/2006">
+        <mc:Choice xmlns:p14="http://schemas.microsoft.com/office/powerpoint/2010/main" xmlns:aink="http://schemas.microsoft.com/office/drawing/2016/ink" Requires="p14 aink">
+          <p:contentPart p14:bwMode="auto" r:id="rId3">
+            <p14:nvContentPartPr>
+              <p14:cNvPr id="2" name="Рукописні дані 1">
+                <a:extLst>
+                  <a:ext uri="{FF2B5EF4-FFF2-40B4-BE49-F238E27FC236}">
+                    <a16:creationId xmlns:a16="http://schemas.microsoft.com/office/drawing/2014/main" id="{D18F802E-8F06-4F13-98DD-38AECF95B675}"/>
+                  </a:ext>
+                </a:extLst>
+              </p14:cNvPr>
+              <p14:cNvContentPartPr/>
+              <p14:nvPr/>
+            </p14:nvContentPartPr>
+            <p14:xfrm>
+              <a:off x="2609685" y="3285540"/>
+              <a:ext cx="2946600" cy="67320"/>
+            </p14:xfrm>
+          </p:contentPart>
+        </mc:Choice>
+        <mc:Fallback>
+          <p:pic>
+            <p:nvPicPr>
+              <p:cNvPr id="2" name="Рукописні дані 1">
+                <a:extLst>
+                  <a:ext uri="{FF2B5EF4-FFF2-40B4-BE49-F238E27FC236}">
+                    <a16:creationId xmlns:a16="http://schemas.microsoft.com/office/drawing/2014/main" id="{D18F802E-8F06-4F13-98DD-38AECF95B675}"/>
+                  </a:ext>
+                </a:extLst>
+              </p:cNvPr>
+              <p:cNvPicPr/>
+              <p:nvPr/>
+            </p:nvPicPr>
+            <p:blipFill>
+              <a:blip r:embed="rId4"/>
+              <a:stretch>
+                <a:fillRect/>
+              </a:stretch>
+            </p:blipFill>
+            <p:spPr>
+              <a:xfrm>
+                <a:off x="2600685" y="3276900"/>
+                <a:ext cx="2964240" cy="84960"/>
+              </a:xfrm>
+              <a:prstGeom prst="rect">
+                <a:avLst/>
+              </a:prstGeom>
+            </p:spPr>
+          </p:pic>
+        </mc:Fallback>
+      </mc:AlternateContent>
+      <mc:AlternateContent xmlns:mc="http://schemas.openxmlformats.org/markup-compatibility/2006">
+        <mc:Choice xmlns:p14="http://schemas.microsoft.com/office/powerpoint/2010/main" xmlns:aink="http://schemas.microsoft.com/office/drawing/2016/ink" Requires="p14 aink">
+          <p:contentPart p14:bwMode="auto" r:id="rId5">
+            <p14:nvContentPartPr>
+              <p14:cNvPr id="3" name="Рукописні дані 2">
+                <a:extLst>
+                  <a:ext uri="{FF2B5EF4-FFF2-40B4-BE49-F238E27FC236}">
+                    <a16:creationId xmlns:a16="http://schemas.microsoft.com/office/drawing/2014/main" id="{324151E7-6748-4512-982E-9627B0D567BF}"/>
+                  </a:ext>
+                </a:extLst>
+              </p14:cNvPr>
+              <p14:cNvContentPartPr/>
+              <p14:nvPr/>
+            </p14:nvContentPartPr>
+            <p14:xfrm>
+              <a:off x="5934285" y="3390660"/>
+              <a:ext cx="3866760" cy="360"/>
+            </p14:xfrm>
+          </p:contentPart>
+        </mc:Choice>
+        <mc:Fallback>
+          <p:pic>
+            <p:nvPicPr>
+              <p:cNvPr id="3" name="Рукописні дані 2">
+                <a:extLst>
+                  <a:ext uri="{FF2B5EF4-FFF2-40B4-BE49-F238E27FC236}">
+                    <a16:creationId xmlns:a16="http://schemas.microsoft.com/office/drawing/2014/main" id="{324151E7-6748-4512-982E-9627B0D567BF}"/>
+                  </a:ext>
+                </a:extLst>
+              </p:cNvPr>
+              <p:cNvPicPr/>
+              <p:nvPr/>
+            </p:nvPicPr>
+            <p:blipFill>
+              <a:blip r:embed="rId6"/>
+              <a:stretch>
+                <a:fillRect/>
+              </a:stretch>
+            </p:blipFill>
+            <p:spPr>
+              <a:xfrm>
+                <a:off x="5925285" y="3382020"/>
+                <a:ext cx="3884400" cy="18000"/>
+              </a:xfrm>
+              <a:prstGeom prst="rect">
+                <a:avLst/>
+              </a:prstGeom>
+            </p:spPr>
+          </p:pic>
+        </mc:Fallback>
+      </mc:AlternateContent>
+      <mc:AlternateContent xmlns:mc="http://schemas.openxmlformats.org/markup-compatibility/2006">
+        <mc:Choice xmlns:p14="http://schemas.microsoft.com/office/powerpoint/2010/main" xmlns:aink="http://schemas.microsoft.com/office/drawing/2016/ink" Requires="p14 aink">
+          <p:contentPart p14:bwMode="auto" r:id="rId7">
+            <p14:nvContentPartPr>
+              <p14:cNvPr id="4" name="Рукописні дані 3">
+                <a:extLst>
+                  <a:ext uri="{FF2B5EF4-FFF2-40B4-BE49-F238E27FC236}">
+                    <a16:creationId xmlns:a16="http://schemas.microsoft.com/office/drawing/2014/main" id="{309D53DF-D5CF-4E0C-84CB-32B62D0E862E}"/>
+                  </a:ext>
+                </a:extLst>
+              </p14:cNvPr>
+              <p14:cNvContentPartPr/>
+              <p14:nvPr/>
+            </p14:nvContentPartPr>
+            <p14:xfrm>
+              <a:off x="5819805" y="4113540"/>
+              <a:ext cx="4603320" cy="77760"/>
+            </p14:xfrm>
+          </p:contentPart>
+        </mc:Choice>
+        <mc:Fallback>
+          <p:pic>
+            <p:nvPicPr>
+              <p:cNvPr id="4" name="Рукописні дані 3">
+                <a:extLst>
+                  <a:ext uri="{FF2B5EF4-FFF2-40B4-BE49-F238E27FC236}">
+                    <a16:creationId xmlns:a16="http://schemas.microsoft.com/office/drawing/2014/main" id="{309D53DF-D5CF-4E0C-84CB-32B62D0E862E}"/>
+                  </a:ext>
+                </a:extLst>
+              </p:cNvPr>
+              <p:cNvPicPr/>
+              <p:nvPr/>
+            </p:nvPicPr>
+            <p:blipFill>
+              <a:blip r:embed="rId8"/>
+              <a:stretch>
+                <a:fillRect/>
+              </a:stretch>
+            </p:blipFill>
+            <p:spPr>
+              <a:xfrm>
+                <a:off x="5811165" y="4104900"/>
+                <a:ext cx="4620960" cy="95400"/>
+              </a:xfrm>
+              <a:prstGeom prst="rect">
+                <a:avLst/>
+              </a:prstGeom>
+            </p:spPr>
+          </p:pic>
+        </mc:Fallback>
+      </mc:AlternateContent>
+      <mc:AlternateContent xmlns:mc="http://schemas.openxmlformats.org/markup-compatibility/2006">
+        <mc:Choice xmlns:p14="http://schemas.microsoft.com/office/powerpoint/2010/main" xmlns:aink="http://schemas.microsoft.com/office/drawing/2016/ink" Requires="p14 aink">
+          <p:contentPart p14:bwMode="auto" r:id="rId9">
+            <p14:nvContentPartPr>
+              <p14:cNvPr id="5" name="Рукописні дані 4">
+                <a:extLst>
+                  <a:ext uri="{FF2B5EF4-FFF2-40B4-BE49-F238E27FC236}">
+                    <a16:creationId xmlns:a16="http://schemas.microsoft.com/office/drawing/2014/main" id="{3F1E1A07-47D2-44F7-906A-B52C4CC2A9ED}"/>
+                  </a:ext>
+                </a:extLst>
+              </p14:cNvPr>
+              <p14:cNvContentPartPr/>
+              <p14:nvPr/>
+            </p14:nvContentPartPr>
+            <p14:xfrm>
+              <a:off x="5810085" y="4484340"/>
+              <a:ext cx="3277440" cy="297360"/>
+            </p14:xfrm>
+          </p:contentPart>
+        </mc:Choice>
+        <mc:Fallback>
+          <p:pic>
+            <p:nvPicPr>
+              <p:cNvPr id="5" name="Рукописні дані 4">
+                <a:extLst>
+                  <a:ext uri="{FF2B5EF4-FFF2-40B4-BE49-F238E27FC236}">
+                    <a16:creationId xmlns:a16="http://schemas.microsoft.com/office/drawing/2014/main" id="{3F1E1A07-47D2-44F7-906A-B52C4CC2A9ED}"/>
+                  </a:ext>
+                </a:extLst>
+              </p:cNvPr>
+              <p:cNvPicPr/>
+              <p:nvPr/>
+            </p:nvPicPr>
+            <p:blipFill>
+              <a:blip r:embed="rId10"/>
+              <a:stretch>
+                <a:fillRect/>
+              </a:stretch>
+            </p:blipFill>
+            <p:spPr>
+              <a:xfrm>
+                <a:off x="5801085" y="4475340"/>
+                <a:ext cx="3295080" cy="315000"/>
+              </a:xfrm>
+              <a:prstGeom prst="rect">
+                <a:avLst/>
+              </a:prstGeom>
+            </p:spPr>
+          </p:pic>
+        </mc:Fallback>
+      </mc:AlternateContent>
     </p:spTree>
   </p:cSld>
   <p:clrMapOvr>
@@ -18065,8 +20318,8 @@
         </p:nvSpPr>
         <p:spPr>
           <a:xfrm>
-            <a:off x="456033" y="3323767"/>
-            <a:ext cx="4000000" cy="4308831"/>
+            <a:off x="456032" y="3323767"/>
+            <a:ext cx="11135893" cy="2092840"/>
           </a:xfrm>
           <a:prstGeom prst="rect">
             <a:avLst/>
@@ -18083,41 +20336,190 @@
           <a:lstStyle/>
           <a:p>
             <a:r>
-              <a:rPr lang="uk" sz="2400"/>
+              <a:rPr lang="uk" sz="2400" dirty="0"/>
               <a:t>int[] numbers = { 1, 2, 3, 5};</a:t>
             </a:r>
-            <a:endParaRPr sz="2400"/>
-          </a:p>
-          <a:p>
-            <a:r>
-              <a:rPr lang="uk" sz="2400"/>
+            <a:endParaRPr sz="2400" dirty="0"/>
+          </a:p>
+          <a:p>
+            <a:r>
+              <a:rPr lang="uk" sz="2400" dirty="0"/>
               <a:t> </a:t>
             </a:r>
-            <a:endParaRPr sz="2400"/>
-          </a:p>
-          <a:p>
-            <a:r>
-              <a:rPr lang="uk" sz="2400"/>
+            <a:endParaRPr sz="2400" dirty="0"/>
+          </a:p>
+          <a:p>
+            <a:r>
+              <a:rPr lang="uk" sz="2400" dirty="0"/>
               <a:t>Console.WriteLine(numbers[^1]);  // 5 - первый с конца или последний элемент</a:t>
             </a:r>
-            <a:endParaRPr sz="2400"/>
-          </a:p>
-          <a:p>
-            <a:r>
-              <a:rPr lang="uk" sz="2400"/>
+            <a:endParaRPr sz="2400" dirty="0"/>
+          </a:p>
+          <a:p>
+            <a:r>
+              <a:rPr lang="uk" sz="2400" dirty="0"/>
               <a:t>Console.WriteLine(numbers[^2]);  // 3 - второй с конца или предпоследний элемент</a:t>
             </a:r>
-            <a:endParaRPr sz="2400"/>
-          </a:p>
-          <a:p>
-            <a:r>
-              <a:rPr lang="uk" sz="2400"/>
+            <a:endParaRPr sz="2400" dirty="0"/>
+          </a:p>
+          <a:p>
+            <a:r>
+              <a:rPr lang="uk" sz="2400" dirty="0"/>
               <a:t>Console.WriteLine(numbers[^3]);  // 2 - третий элемент с конца</a:t>
             </a:r>
-            <a:endParaRPr sz="2400"/>
+            <a:endParaRPr sz="2400" dirty="0"/>
           </a:p>
         </p:txBody>
       </p:sp>
+      <mc:AlternateContent xmlns:mc="http://schemas.openxmlformats.org/markup-compatibility/2006" xmlns:p14="http://schemas.microsoft.com/office/powerpoint/2010/main">
+        <mc:Choice Requires="p14">
+          <p:contentPart p14:bwMode="auto" r:id="rId3">
+            <p14:nvContentPartPr>
+              <p14:cNvPr id="2" name="Рукописні дані 1">
+                <a:extLst>
+                  <a:ext uri="{FF2B5EF4-FFF2-40B4-BE49-F238E27FC236}">
+                    <a16:creationId xmlns:a16="http://schemas.microsoft.com/office/drawing/2014/main" id="{9A5CED56-83DB-4629-809C-12DE0B98135F}"/>
+                  </a:ext>
+                </a:extLst>
+              </p14:cNvPr>
+              <p14:cNvContentPartPr/>
+              <p14:nvPr/>
+            </p14:nvContentPartPr>
+            <p14:xfrm>
+              <a:off x="2209365" y="5562510"/>
+              <a:ext cx="360" cy="360"/>
+            </p14:xfrm>
+          </p:contentPart>
+        </mc:Choice>
+        <mc:Fallback xmlns="">
+          <p:pic>
+            <p:nvPicPr>
+              <p:cNvPr id="2" name="Рукописні дані 1">
+                <a:extLst>
+                  <a:ext uri="{FF2B5EF4-FFF2-40B4-BE49-F238E27FC236}">
+                    <a16:creationId xmlns:a16="http://schemas.microsoft.com/office/drawing/2014/main" id="{9A5CED56-83DB-4629-809C-12DE0B98135F}"/>
+                  </a:ext>
+                </a:extLst>
+              </p:cNvPr>
+              <p:cNvPicPr/>
+              <p:nvPr/>
+            </p:nvPicPr>
+            <p:blipFill>
+              <a:blip r:embed="rId4"/>
+              <a:stretch>
+                <a:fillRect/>
+              </a:stretch>
+            </p:blipFill>
+            <p:spPr>
+              <a:xfrm>
+                <a:off x="2200725" y="5553870"/>
+                <a:ext cx="18000" cy="18000"/>
+              </a:xfrm>
+              <a:prstGeom prst="rect">
+                <a:avLst/>
+              </a:prstGeom>
+            </p:spPr>
+          </p:pic>
+        </mc:Fallback>
+      </mc:AlternateContent>
+      <mc:AlternateContent xmlns:mc="http://schemas.openxmlformats.org/markup-compatibility/2006">
+        <mc:Choice xmlns:p14="http://schemas.microsoft.com/office/powerpoint/2010/main" xmlns:aink="http://schemas.microsoft.com/office/drawing/2016/ink" Requires="p14 aink">
+          <p:contentPart p14:bwMode="auto" r:id="rId5">
+            <p14:nvContentPartPr>
+              <p14:cNvPr id="3" name="Рукописні дані 2">
+                <a:extLst>
+                  <a:ext uri="{FF2B5EF4-FFF2-40B4-BE49-F238E27FC236}">
+                    <a16:creationId xmlns:a16="http://schemas.microsoft.com/office/drawing/2014/main" id="{0E02A614-9AE6-4E06-8C5B-820E9096E87D}"/>
+                  </a:ext>
+                </a:extLst>
+              </p14:cNvPr>
+              <p14:cNvContentPartPr/>
+              <p14:nvPr/>
+            </p14:nvContentPartPr>
+            <p14:xfrm>
+              <a:off x="4095405" y="4381380"/>
+              <a:ext cx="178560" cy="360"/>
+            </p14:xfrm>
+          </p:contentPart>
+        </mc:Choice>
+        <mc:Fallback>
+          <p:pic>
+            <p:nvPicPr>
+              <p:cNvPr id="3" name="Рукописні дані 2">
+                <a:extLst>
+                  <a:ext uri="{FF2B5EF4-FFF2-40B4-BE49-F238E27FC236}">
+                    <a16:creationId xmlns:a16="http://schemas.microsoft.com/office/drawing/2014/main" id="{0E02A614-9AE6-4E06-8C5B-820E9096E87D}"/>
+                  </a:ext>
+                </a:extLst>
+              </p:cNvPr>
+              <p:cNvPicPr/>
+              <p:nvPr/>
+            </p:nvPicPr>
+            <p:blipFill>
+              <a:blip r:embed="rId6"/>
+              <a:stretch>
+                <a:fillRect/>
+              </a:stretch>
+            </p:blipFill>
+            <p:spPr>
+              <a:xfrm>
+                <a:off x="4086765" y="4372380"/>
+                <a:ext cx="196200" cy="18000"/>
+              </a:xfrm>
+              <a:prstGeom prst="rect">
+                <a:avLst/>
+              </a:prstGeom>
+            </p:spPr>
+          </p:pic>
+        </mc:Fallback>
+      </mc:AlternateContent>
+      <p:pic>
+        <p:nvPicPr>
+          <p:cNvPr id="1026" name="Picture 2" descr="Мем Про Собаку Где Он Закрывает Глаза | TikTok">
+            <a:extLst>
+              <a:ext uri="{FF2B5EF4-FFF2-40B4-BE49-F238E27FC236}">
+                <a16:creationId xmlns:a16="http://schemas.microsoft.com/office/drawing/2014/main" id="{1D6E585B-F984-48F4-8DEA-21842448E755}"/>
+              </a:ext>
+            </a:extLst>
+          </p:cNvPr>
+          <p:cNvPicPr>
+            <a:picLocks noChangeAspect="1" noChangeArrowheads="1"/>
+          </p:cNvPicPr>
+          <p:nvPr/>
+        </p:nvPicPr>
+        <p:blipFill>
+          <a:blip r:embed="rId7">
+            <a:extLst>
+              <a:ext uri="{28A0092B-C50C-407E-A947-70E740481C1C}">
+                <a14:useLocalDpi xmlns:a14="http://schemas.microsoft.com/office/drawing/2010/main" val="0"/>
+              </a:ext>
+            </a:extLst>
+          </a:blip>
+          <a:srcRect/>
+          <a:stretch>
+            <a:fillRect/>
+          </a:stretch>
+        </p:blipFill>
+        <p:spPr bwMode="auto">
+          <a:xfrm>
+            <a:off x="10815730" y="5491994"/>
+            <a:ext cx="1128620" cy="1154039"/>
+          </a:xfrm>
+          <a:prstGeom prst="rect">
+            <a:avLst/>
+          </a:prstGeom>
+          <a:noFill/>
+          <a:extLst>
+            <a:ext uri="{909E8E84-426E-40DD-AFC4-6F175D3DCCD1}">
+              <a14:hiddenFill xmlns:a14="http://schemas.microsoft.com/office/drawing/2010/main">
+                <a:solidFill>
+                  <a:srgbClr val="FFFFFF"/>
+                </a:solidFill>
+              </a14:hiddenFill>
+            </a:ext>
+          </a:extLst>
+        </p:spPr>
+      </p:pic>
     </p:spTree>
   </p:cSld>
   <p:clrMapOvr>
